--- a/GreenLoop_Appendix.pptx
+++ b/GreenLoop_Appendix.pptx
@@ -4,14 +4,17 @@
   <p:sldMasterIdLst>
     <p:sldMasterId id="2147483648" r:id="rId1"/>
   </p:sldMasterIdLst>
+  <p:notesMasterIdLst>
+    <p:notesMasterId r:id="rId7"/>
+  </p:notesMasterIdLst>
   <p:sldIdLst>
-    <p:sldId id="256" r:id="rId7"/>
-    <p:sldId id="257" r:id="rId8"/>
-    <p:sldId id="258" r:id="rId9"/>
-    <p:sldId id="259" r:id="rId10"/>
-    <p:sldId id="260" r:id="rId11"/>
+    <p:sldId id="256" r:id="rId2"/>
+    <p:sldId id="257" r:id="rId3"/>
+    <p:sldId id="258" r:id="rId4"/>
+    <p:sldId id="259" r:id="rId5"/>
+    <p:sldId id="260" r:id="rId6"/>
   </p:sldIdLst>
-  <p:sldSz cx="12191695" cy="6858000" type="screen4x3"/>
+  <p:sldSz cx="12192000" cy="6858000"/>
   <p:notesSz cx="6858000" cy="9144000"/>
   <p:defaultTextStyle>
     <a:defPPr>
@@ -108,7 +111,457 @@
       </a:defRPr>
     </a:lvl9pPr>
   </p:defaultTextStyle>
+  <p:extLst>
+    <p:ext uri="{EFAFB233-063F-42B5-8137-9DF3F51BA10A}">
+      <p15:sldGuideLst xmlns:p15="http://schemas.microsoft.com/office/powerpoint/2012/main">
+        <p15:guide id="1" orient="horz" pos="2160">
+          <p15:clr>
+            <a:srgbClr val="A4A3A4"/>
+          </p15:clr>
+        </p15:guide>
+        <p15:guide id="2" pos="2880">
+          <p15:clr>
+            <a:srgbClr val="A4A3A4"/>
+          </p15:clr>
+        </p15:guide>
+      </p15:sldGuideLst>
+    </p:ext>
+  </p:extLst>
 </p:presentation>
+</file>
+
+<file path=ppt/notesMasters/notesMaster1.xml><?xml version="1.0" encoding="utf-8"?>
+<p:notesMaster xmlns:a="http://schemas.openxmlformats.org/drawingml/2006/main" xmlns:r="http://schemas.openxmlformats.org/officeDocument/2006/relationships" xmlns:p="http://schemas.openxmlformats.org/presentationml/2006/main">
+  <p:cSld>
+    <p:bg>
+      <p:bgRef idx="1001">
+        <a:schemeClr val="bg1"/>
+      </p:bgRef>
+    </p:bg>
+    <p:spTree>
+      <p:nvGrpSpPr>
+        <p:cNvPr id="1" name=""/>
+        <p:cNvGrpSpPr/>
+        <p:nvPr/>
+      </p:nvGrpSpPr>
+      <p:grpSpPr>
+        <a:xfrm>
+          <a:off x="0" y="0"/>
+          <a:ext cx="0" cy="0"/>
+          <a:chOff x="0" y="0"/>
+          <a:chExt cx="0" cy="0"/>
+        </a:xfrm>
+      </p:grpSpPr>
+      <p:sp>
+        <p:nvSpPr>
+          <p:cNvPr id="2" name="Header Placeholder 1"/>
+          <p:cNvSpPr>
+            <a:spLocks noGrp="1"/>
+          </p:cNvSpPr>
+          <p:nvPr>
+            <p:ph type="hdr" sz="quarter"/>
+          </p:nvPr>
+        </p:nvSpPr>
+        <p:spPr>
+          <a:xfrm>
+            <a:off x="0" y="0"/>
+            <a:ext cx="2971800" cy="458788"/>
+          </a:xfrm>
+          <a:prstGeom prst="rect">
+            <a:avLst/>
+          </a:prstGeom>
+        </p:spPr>
+        <p:txBody>
+          <a:bodyPr vert="horz" lIns="91440" tIns="45720" rIns="91440" bIns="45720" rtlCol="0"/>
+          <a:lstStyle>
+            <a:lvl1pPr algn="l">
+              <a:defRPr sz="1200"/>
+            </a:lvl1pPr>
+          </a:lstStyle>
+          <a:p>
+            <a:endParaRPr lang="en-US"/>
+          </a:p>
+        </p:txBody>
+      </p:sp>
+      <p:sp>
+        <p:nvSpPr>
+          <p:cNvPr id="3" name="Date Placeholder 2"/>
+          <p:cNvSpPr>
+            <a:spLocks noGrp="1"/>
+          </p:cNvSpPr>
+          <p:nvPr>
+            <p:ph type="dt" idx="1"/>
+          </p:nvPr>
+        </p:nvSpPr>
+        <p:spPr>
+          <a:xfrm>
+            <a:off x="3884613" y="0"/>
+            <a:ext cx="2971800" cy="458788"/>
+          </a:xfrm>
+          <a:prstGeom prst="rect">
+            <a:avLst/>
+          </a:prstGeom>
+        </p:spPr>
+        <p:txBody>
+          <a:bodyPr vert="horz" lIns="91440" tIns="45720" rIns="91440" bIns="45720" rtlCol="0"/>
+          <a:lstStyle>
+            <a:lvl1pPr algn="r">
+              <a:defRPr sz="1200"/>
+            </a:lvl1pPr>
+          </a:lstStyle>
+          <a:p>
+            <a:fld id="{D60DB328-4870-4863-860B-30354422FEC5}" type="datetimeFigureOut">
+              <a:rPr lang="en-US" smtClean="0"/>
+              <a:t>10/22/2026</a:t>
+            </a:fld>
+            <a:endParaRPr lang="en-US"/>
+          </a:p>
+        </p:txBody>
+      </p:sp>
+      <p:sp>
+        <p:nvSpPr>
+          <p:cNvPr id="4" name="Slide Image Placeholder 3"/>
+          <p:cNvSpPr>
+            <a:spLocks noGrp="1" noRot="1" noChangeAspect="1"/>
+          </p:cNvSpPr>
+          <p:nvPr>
+            <p:ph type="sldImg" idx="2"/>
+          </p:nvPr>
+        </p:nvSpPr>
+        <p:spPr>
+          <a:xfrm>
+            <a:off x="685800" y="1143000"/>
+            <a:ext cx="5486400" cy="3086100"/>
+          </a:xfrm>
+          <a:prstGeom prst="rect">
+            <a:avLst/>
+          </a:prstGeom>
+          <a:noFill/>
+          <a:ln w="12700">
+            <a:solidFill>
+              <a:prstClr val="black"/>
+            </a:solidFill>
+          </a:ln>
+        </p:spPr>
+        <p:txBody>
+          <a:bodyPr vert="horz" lIns="91440" tIns="45720" rIns="91440" bIns="45720" rtlCol="0" anchor="ctr"/>
+          <a:lstStyle/>
+          <a:p>
+            <a:endParaRPr lang="en-US"/>
+          </a:p>
+        </p:txBody>
+      </p:sp>
+      <p:sp>
+        <p:nvSpPr>
+          <p:cNvPr id="5" name="Notes Placeholder 4"/>
+          <p:cNvSpPr>
+            <a:spLocks noGrp="1"/>
+          </p:cNvSpPr>
+          <p:nvPr>
+            <p:ph type="body" sz="quarter" idx="3"/>
+          </p:nvPr>
+        </p:nvSpPr>
+        <p:spPr>
+          <a:xfrm>
+            <a:off x="685800" y="4400550"/>
+            <a:ext cx="5486400" cy="3600450"/>
+          </a:xfrm>
+          <a:prstGeom prst="rect">
+            <a:avLst/>
+          </a:prstGeom>
+        </p:spPr>
+        <p:txBody>
+          <a:bodyPr vert="horz" lIns="91440" tIns="45720" rIns="91440" bIns="45720" rtlCol="0"/>
+          <a:lstStyle/>
+          <a:p>
+            <a:pPr lvl="0"/>
+            <a:r>
+              <a:rPr lang="en-US" smtClean="0"/>
+              <a:t>Click to edit Master text styles</a:t>
+            </a:r>
+          </a:p>
+          <a:p>
+            <a:pPr lvl="1"/>
+            <a:r>
+              <a:rPr lang="en-US" smtClean="0"/>
+              <a:t>Second level</a:t>
+            </a:r>
+          </a:p>
+          <a:p>
+            <a:pPr lvl="2"/>
+            <a:r>
+              <a:rPr lang="en-US" smtClean="0"/>
+              <a:t>Third level</a:t>
+            </a:r>
+          </a:p>
+          <a:p>
+            <a:pPr lvl="3"/>
+            <a:r>
+              <a:rPr lang="en-US" smtClean="0"/>
+              <a:t>Fourth level</a:t>
+            </a:r>
+          </a:p>
+          <a:p>
+            <a:pPr lvl="4"/>
+            <a:r>
+              <a:rPr lang="en-US" smtClean="0"/>
+              <a:t>Fifth level</a:t>
+            </a:r>
+            <a:endParaRPr lang="en-US"/>
+          </a:p>
+        </p:txBody>
+      </p:sp>
+      <p:sp>
+        <p:nvSpPr>
+          <p:cNvPr id="6" name="Footer Placeholder 5"/>
+          <p:cNvSpPr>
+            <a:spLocks noGrp="1"/>
+          </p:cNvSpPr>
+          <p:nvPr>
+            <p:ph type="ftr" sz="quarter" idx="4"/>
+          </p:nvPr>
+        </p:nvSpPr>
+        <p:spPr>
+          <a:xfrm>
+            <a:off x="0" y="8685213"/>
+            <a:ext cx="2971800" cy="458787"/>
+          </a:xfrm>
+          <a:prstGeom prst="rect">
+            <a:avLst/>
+          </a:prstGeom>
+        </p:spPr>
+        <p:txBody>
+          <a:bodyPr vert="horz" lIns="91440" tIns="45720" rIns="91440" bIns="45720" rtlCol="0" anchor="b"/>
+          <a:lstStyle>
+            <a:lvl1pPr algn="l">
+              <a:defRPr sz="1200"/>
+            </a:lvl1pPr>
+          </a:lstStyle>
+          <a:p>
+            <a:endParaRPr lang="en-US"/>
+          </a:p>
+        </p:txBody>
+      </p:sp>
+      <p:sp>
+        <p:nvSpPr>
+          <p:cNvPr id="7" name="Slide Number Placeholder 6"/>
+          <p:cNvSpPr>
+            <a:spLocks noGrp="1"/>
+          </p:cNvSpPr>
+          <p:nvPr>
+            <p:ph type="sldNum" sz="quarter" idx="5"/>
+          </p:nvPr>
+        </p:nvSpPr>
+        <p:spPr>
+          <a:xfrm>
+            <a:off x="3884613" y="8685213"/>
+            <a:ext cx="2971800" cy="458787"/>
+          </a:xfrm>
+          <a:prstGeom prst="rect">
+            <a:avLst/>
+          </a:prstGeom>
+        </p:spPr>
+        <p:txBody>
+          <a:bodyPr vert="horz" lIns="91440" tIns="45720" rIns="91440" bIns="45720" rtlCol="0" anchor="b"/>
+          <a:lstStyle>
+            <a:lvl1pPr algn="r">
+              <a:defRPr sz="1200"/>
+            </a:lvl1pPr>
+          </a:lstStyle>
+          <a:p>
+            <a:fld id="{951C4E7E-6978-4382-B39A-1E2DD0C94792}" type="slidenum">
+              <a:rPr lang="en-US" smtClean="0"/>
+              <a:t>‹#›</a:t>
+            </a:fld>
+            <a:endParaRPr lang="en-US"/>
+          </a:p>
+        </p:txBody>
+      </p:sp>
+    </p:spTree>
+    <p:extLst>
+      <p:ext uri="{BB962C8B-B14F-4D97-AF65-F5344CB8AC3E}">
+        <p14:creationId xmlns:p14="http://schemas.microsoft.com/office/powerpoint/2010/main" val="621762064"/>
+      </p:ext>
+    </p:extLst>
+  </p:cSld>
+  <p:clrMap bg1="lt1" tx1="dk1" bg2="lt2" tx2="dk2" accent1="accent1" accent2="accent2" accent3="accent3" accent4="accent4" accent5="accent5" accent6="accent6" hlink="hlink" folHlink="folHlink"/>
+  <p:notesStyle>
+    <a:lvl1pPr marL="0" algn="l" defTabSz="914400" rtl="0" eaLnBrk="1" latinLnBrk="0" hangingPunct="1">
+      <a:defRPr sz="1200" kern="1200">
+        <a:solidFill>
+          <a:schemeClr val="tx1"/>
+        </a:solidFill>
+        <a:latin typeface="+mn-lt"/>
+        <a:ea typeface="+mn-ea"/>
+        <a:cs typeface="+mn-cs"/>
+      </a:defRPr>
+    </a:lvl1pPr>
+    <a:lvl2pPr marL="457200" algn="l" defTabSz="914400" rtl="0" eaLnBrk="1" latinLnBrk="0" hangingPunct="1">
+      <a:defRPr sz="1200" kern="1200">
+        <a:solidFill>
+          <a:schemeClr val="tx1"/>
+        </a:solidFill>
+        <a:latin typeface="+mn-lt"/>
+        <a:ea typeface="+mn-ea"/>
+        <a:cs typeface="+mn-cs"/>
+      </a:defRPr>
+    </a:lvl2pPr>
+    <a:lvl3pPr marL="914400" algn="l" defTabSz="914400" rtl="0" eaLnBrk="1" latinLnBrk="0" hangingPunct="1">
+      <a:defRPr sz="1200" kern="1200">
+        <a:solidFill>
+          <a:schemeClr val="tx1"/>
+        </a:solidFill>
+        <a:latin typeface="+mn-lt"/>
+        <a:ea typeface="+mn-ea"/>
+        <a:cs typeface="+mn-cs"/>
+      </a:defRPr>
+    </a:lvl3pPr>
+    <a:lvl4pPr marL="1371600" algn="l" defTabSz="914400" rtl="0" eaLnBrk="1" latinLnBrk="0" hangingPunct="1">
+      <a:defRPr sz="1200" kern="1200">
+        <a:solidFill>
+          <a:schemeClr val="tx1"/>
+        </a:solidFill>
+        <a:latin typeface="+mn-lt"/>
+        <a:ea typeface="+mn-ea"/>
+        <a:cs typeface="+mn-cs"/>
+      </a:defRPr>
+    </a:lvl4pPr>
+    <a:lvl5pPr marL="1828800" algn="l" defTabSz="914400" rtl="0" eaLnBrk="1" latinLnBrk="0" hangingPunct="1">
+      <a:defRPr sz="1200" kern="1200">
+        <a:solidFill>
+          <a:schemeClr val="tx1"/>
+        </a:solidFill>
+        <a:latin typeface="+mn-lt"/>
+        <a:ea typeface="+mn-ea"/>
+        <a:cs typeface="+mn-cs"/>
+      </a:defRPr>
+    </a:lvl5pPr>
+    <a:lvl6pPr marL="2286000" algn="l" defTabSz="914400" rtl="0" eaLnBrk="1" latinLnBrk="0" hangingPunct="1">
+      <a:defRPr sz="1200" kern="1200">
+        <a:solidFill>
+          <a:schemeClr val="tx1"/>
+        </a:solidFill>
+        <a:latin typeface="+mn-lt"/>
+        <a:ea typeface="+mn-ea"/>
+        <a:cs typeface="+mn-cs"/>
+      </a:defRPr>
+    </a:lvl6pPr>
+    <a:lvl7pPr marL="2743200" algn="l" defTabSz="914400" rtl="0" eaLnBrk="1" latinLnBrk="0" hangingPunct="1">
+      <a:defRPr sz="1200" kern="1200">
+        <a:solidFill>
+          <a:schemeClr val="tx1"/>
+        </a:solidFill>
+        <a:latin typeface="+mn-lt"/>
+        <a:ea typeface="+mn-ea"/>
+        <a:cs typeface="+mn-cs"/>
+      </a:defRPr>
+    </a:lvl7pPr>
+    <a:lvl8pPr marL="3200400" algn="l" defTabSz="914400" rtl="0" eaLnBrk="1" latinLnBrk="0" hangingPunct="1">
+      <a:defRPr sz="1200" kern="1200">
+        <a:solidFill>
+          <a:schemeClr val="tx1"/>
+        </a:solidFill>
+        <a:latin typeface="+mn-lt"/>
+        <a:ea typeface="+mn-ea"/>
+        <a:cs typeface="+mn-cs"/>
+      </a:defRPr>
+    </a:lvl8pPr>
+    <a:lvl9pPr marL="3657600" algn="l" defTabSz="914400" rtl="0" eaLnBrk="1" latinLnBrk="0" hangingPunct="1">
+      <a:defRPr sz="1200" kern="1200">
+        <a:solidFill>
+          <a:schemeClr val="tx1"/>
+        </a:solidFill>
+        <a:latin typeface="+mn-lt"/>
+        <a:ea typeface="+mn-ea"/>
+        <a:cs typeface="+mn-cs"/>
+      </a:defRPr>
+    </a:lvl9pPr>
+  </p:notesStyle>
+</p:notesMaster>
+</file>
+
+<file path=ppt/notesSlides/notesSlide1.xml><?xml version="1.0" encoding="utf-8"?>
+<p:notes xmlns:a="http://schemas.openxmlformats.org/drawingml/2006/main" xmlns:r="http://schemas.openxmlformats.org/officeDocument/2006/relationships" xmlns:p="http://schemas.openxmlformats.org/presentationml/2006/main">
+  <p:cSld>
+    <p:spTree>
+      <p:nvGrpSpPr>
+        <p:cNvPr id="1" name=""/>
+        <p:cNvGrpSpPr/>
+        <p:nvPr/>
+      </p:nvGrpSpPr>
+      <p:grpSpPr>
+        <a:xfrm>
+          <a:off x="0" y="0"/>
+          <a:ext cx="0" cy="0"/>
+          <a:chOff x="0" y="0"/>
+          <a:chExt cx="0" cy="0"/>
+        </a:xfrm>
+      </p:grpSpPr>
+      <p:sp>
+        <p:nvSpPr>
+          <p:cNvPr id="2" name="Slide Image Placeholder 1"/>
+          <p:cNvSpPr>
+            <a:spLocks noGrp="1" noRot="1" noChangeAspect="1"/>
+          </p:cNvSpPr>
+          <p:nvPr>
+            <p:ph type="sldImg"/>
+          </p:nvPr>
+        </p:nvSpPr>
+        <p:spPr/>
+      </p:sp>
+      <p:sp>
+        <p:nvSpPr>
+          <p:cNvPr id="3" name="Notes Placeholder 2"/>
+          <p:cNvSpPr>
+            <a:spLocks noGrp="1"/>
+          </p:cNvSpPr>
+          <p:nvPr>
+            <p:ph type="body" idx="1"/>
+          </p:nvPr>
+        </p:nvSpPr>
+        <p:spPr/>
+        <p:txBody>
+          <a:bodyPr/>
+          <a:lstStyle/>
+          <a:p>
+            <a:endParaRPr lang="en-US" dirty="0"/>
+          </a:p>
+        </p:txBody>
+      </p:sp>
+      <p:sp>
+        <p:nvSpPr>
+          <p:cNvPr id="4" name="Slide Number Placeholder 3"/>
+          <p:cNvSpPr>
+            <a:spLocks noGrp="1"/>
+          </p:cNvSpPr>
+          <p:nvPr>
+            <p:ph type="sldNum" sz="quarter" idx="10"/>
+          </p:nvPr>
+        </p:nvSpPr>
+        <p:spPr/>
+        <p:txBody>
+          <a:bodyPr/>
+          <a:lstStyle/>
+          <a:p>
+            <a:fld id="{951C4E7E-6978-4382-B39A-1E2DD0C94792}" type="slidenum">
+              <a:rPr lang="en-US" smtClean="0"/>
+              <a:t>3</a:t>
+            </a:fld>
+            <a:endParaRPr lang="en-US"/>
+          </a:p>
+        </p:txBody>
+      </p:sp>
+    </p:spTree>
+    <p:extLst>
+      <p:ext uri="{BB962C8B-B14F-4D97-AF65-F5344CB8AC3E}">
+        <p14:creationId xmlns:p14="http://schemas.microsoft.com/office/powerpoint/2010/main" val="3191173494"/>
+      </p:ext>
+    </p:extLst>
+  </p:cSld>
+  <p:clrMapOvr>
+    <a:masterClrMapping/>
+  </p:clrMapOvr>
+</p:notes>
 </file>
 
 <file path=ppt/slideLayouts/slideLayout1.xml><?xml version="1.0" encoding="utf-8"?>
@@ -292,7 +745,7 @@
           <a:p>
             <a:fld id="{5BCAD085-E8A6-8845-BD4E-CB4CCA059FC4}" type="datetimeFigureOut">
               <a:rPr lang="en-US" smtClean="0"/>
-              <a:t>1/27/13</a:t>
+              <a:t>10/22/2026</a:t>
             </a:fld>
             <a:endParaRPr lang="en-US"/>
           </a:p>
@@ -462,7 +915,7 @@
           <a:p>
             <a:fld id="{5BCAD085-E8A6-8845-BD4E-CB4CCA059FC4}" type="datetimeFigureOut">
               <a:rPr lang="en-US" smtClean="0"/>
-              <a:t>1/27/13</a:t>
+              <a:t>10/22/2026</a:t>
             </a:fld>
             <a:endParaRPr lang="en-US"/>
           </a:p>
@@ -642,7 +1095,7 @@
           <a:p>
             <a:fld id="{5BCAD085-E8A6-8845-BD4E-CB4CCA059FC4}" type="datetimeFigureOut">
               <a:rPr lang="en-US" smtClean="0"/>
-              <a:t>1/27/13</a:t>
+              <a:t>10/22/2026</a:t>
             </a:fld>
             <a:endParaRPr lang="en-US"/>
           </a:p>
@@ -812,7 +1265,7 @@
           <a:p>
             <a:fld id="{5BCAD085-E8A6-8845-BD4E-CB4CCA059FC4}" type="datetimeFigureOut">
               <a:rPr lang="en-US" smtClean="0"/>
-              <a:t>1/27/13</a:t>
+              <a:t>10/22/2026</a:t>
             </a:fld>
             <a:endParaRPr lang="en-US"/>
           </a:p>
@@ -1058,7 +1511,7 @@
           <a:p>
             <a:fld id="{5BCAD085-E8A6-8845-BD4E-CB4CCA059FC4}" type="datetimeFigureOut">
               <a:rPr lang="en-US" smtClean="0"/>
-              <a:t>1/27/13</a:t>
+              <a:t>10/22/2026</a:t>
             </a:fld>
             <a:endParaRPr lang="en-US"/>
           </a:p>
@@ -1346,7 +1799,7 @@
           <a:p>
             <a:fld id="{5BCAD085-E8A6-8845-BD4E-CB4CCA059FC4}" type="datetimeFigureOut">
               <a:rPr lang="en-US" smtClean="0"/>
-              <a:t>1/27/13</a:t>
+              <a:t>10/22/2026</a:t>
             </a:fld>
             <a:endParaRPr lang="en-US"/>
           </a:p>
@@ -1768,7 +2221,7 @@
           <a:p>
             <a:fld id="{5BCAD085-E8A6-8845-BD4E-CB4CCA059FC4}" type="datetimeFigureOut">
               <a:rPr lang="en-US" smtClean="0"/>
-              <a:t>1/27/13</a:t>
+              <a:t>10/22/2026</a:t>
             </a:fld>
             <a:endParaRPr lang="en-US"/>
           </a:p>
@@ -1886,7 +2339,7 @@
           <a:p>
             <a:fld id="{5BCAD085-E8A6-8845-BD4E-CB4CCA059FC4}" type="datetimeFigureOut">
               <a:rPr lang="en-US" smtClean="0"/>
-              <a:t>1/27/13</a:t>
+              <a:t>10/22/2026</a:t>
             </a:fld>
             <a:endParaRPr lang="en-US"/>
           </a:p>
@@ -1981,7 +2434,7 @@
           <a:p>
             <a:fld id="{5BCAD085-E8A6-8845-BD4E-CB4CCA059FC4}" type="datetimeFigureOut">
               <a:rPr lang="en-US" smtClean="0"/>
-              <a:t>1/27/13</a:t>
+              <a:t>10/22/2026</a:t>
             </a:fld>
             <a:endParaRPr lang="en-US"/>
           </a:p>
@@ -2258,7 +2711,7 @@
           <a:p>
             <a:fld id="{5BCAD085-E8A6-8845-BD4E-CB4CCA059FC4}" type="datetimeFigureOut">
               <a:rPr lang="en-US" smtClean="0"/>
-              <a:t>1/27/13</a:t>
+              <a:t>10/22/2026</a:t>
             </a:fld>
             <a:endParaRPr lang="en-US"/>
           </a:p>
@@ -2511,7 +2964,7 @@
           <a:p>
             <a:fld id="{5BCAD085-E8A6-8845-BD4E-CB4CCA059FC4}" type="datetimeFigureOut">
               <a:rPr lang="en-US" smtClean="0"/>
-              <a:t>1/27/13</a:t>
+              <a:t>10/22/2026</a:t>
             </a:fld>
             <a:endParaRPr lang="en-US"/>
           </a:p>
@@ -2724,7 +3177,7 @@
           <a:p>
             <a:fld id="{5BCAD085-E8A6-8845-BD4E-CB4CCA059FC4}" type="datetimeFigureOut">
               <a:rPr lang="en-US" smtClean="0"/>
-              <a:t>1/27/13</a:t>
+              <a:t>10/22/2026</a:t>
             </a:fld>
             <a:endParaRPr lang="en-US"/>
           </a:p>
@@ -3083,7 +3536,7 @@
 </file>
 
 <file path=ppt/slides/slide1.xml><?xml version="1.0" encoding="utf-8"?>
-<p:sld xmlns:a="http://schemas.openxmlformats.org/drawingml/2006/main" xmlns:p="http://schemas.openxmlformats.org/presentationml/2006/main" xmlns:r="http://schemas.openxmlformats.org/officeDocument/2006/relationships">
+<p:sld xmlns:a="http://schemas.openxmlformats.org/drawingml/2006/main" xmlns:r="http://schemas.openxmlformats.org/officeDocument/2006/relationships" xmlns:p="http://schemas.openxmlformats.org/presentationml/2006/main">
   <p:cSld>
     <p:spTree>
       <p:nvGrpSpPr>
@@ -3091,7 +3544,14 @@
         <p:cNvGrpSpPr/>
         <p:nvPr/>
       </p:nvGrpSpPr>
-      <p:grpSpPr/>
+      <p:grpSpPr>
+        <a:xfrm>
+          <a:off x="0" y="0"/>
+          <a:ext cx="0" cy="0"/>
+          <a:chOff x="0" y="0"/>
+          <a:chExt cx="0" cy="0"/>
+        </a:xfrm>
+      </p:grpSpPr>
       <p:sp>
         <p:nvSpPr>
           <p:cNvPr id="2" name="Rectangle 1"/>
@@ -3133,6 +3593,7 @@
           <a:lstStyle/>
           <a:p>
             <a:pPr algn="ctr"/>
+            <a:endParaRPr/>
           </a:p>
         </p:txBody>
       </p:sp>
@@ -3153,7 +3614,7 @@
           <a:noFill/>
         </p:spPr>
         <p:txBody>
-          <a:bodyPr wrap="square" anchor="t" lIns="0" rIns="0" tIns="0" bIns="0">
+          <a:bodyPr wrap="square" lIns="0" tIns="0" rIns="0" bIns="0" anchor="t">
             <a:spAutoFit/>
           </a:bodyPr>
           <a:lstStyle/>
@@ -3192,7 +3653,7 @@
           <a:noFill/>
         </p:spPr>
         <p:txBody>
-          <a:bodyPr wrap="square" anchor="t" lIns="0" rIns="0" tIns="0" bIns="0">
+          <a:bodyPr wrap="square" lIns="0" tIns="0" rIns="0" bIns="0" anchor="t">
             <a:spAutoFit/>
           </a:bodyPr>
           <a:lstStyle/>
@@ -3223,7 +3684,7 @@
 </file>
 
 <file path=ppt/slides/slide2.xml><?xml version="1.0" encoding="utf-8"?>
-<p:sld xmlns:a="http://schemas.openxmlformats.org/drawingml/2006/main" xmlns:p="http://schemas.openxmlformats.org/presentationml/2006/main" xmlns:r="http://schemas.openxmlformats.org/officeDocument/2006/relationships">
+<p:sld xmlns:a="http://schemas.openxmlformats.org/drawingml/2006/main" xmlns:r="http://schemas.openxmlformats.org/officeDocument/2006/relationships" xmlns:p="http://schemas.openxmlformats.org/presentationml/2006/main">
   <p:cSld>
     <p:spTree>
       <p:nvGrpSpPr>
@@ -3231,7 +3692,14 @@
         <p:cNvGrpSpPr/>
         <p:nvPr/>
       </p:nvGrpSpPr>
-      <p:grpSpPr/>
+      <p:grpSpPr>
+        <a:xfrm>
+          <a:off x="0" y="0"/>
+          <a:ext cx="0" cy="0"/>
+          <a:chOff x="0" y="0"/>
+          <a:chExt cx="0" cy="0"/>
+        </a:xfrm>
+      </p:grpSpPr>
       <p:sp>
         <p:nvSpPr>
           <p:cNvPr id="2" name="Rectangle 1"/>
@@ -3273,6 +3741,7 @@
           <a:lstStyle/>
           <a:p>
             <a:pPr algn="ctr"/>
+            <a:endParaRPr/>
           </a:p>
         </p:txBody>
       </p:sp>
@@ -3346,7 +3815,7 @@
           <a:noFill/>
         </p:spPr>
         <p:txBody>
-          <a:bodyPr wrap="square" anchor="ctr" lIns="0" rIns="0" tIns="0" bIns="0">
+          <a:bodyPr wrap="square" lIns="0" tIns="0" rIns="0" bIns="0" anchor="ctr">
             <a:spAutoFit/>
           </a:bodyPr>
           <a:lstStyle/>
@@ -3433,6 +3902,7 @@
           <a:lstStyle/>
           <a:p>
             <a:pPr algn="ctr"/>
+            <a:endParaRPr/>
           </a:p>
         </p:txBody>
       </p:sp>
@@ -3453,7 +3923,7 @@
           <a:noFill/>
         </p:spPr>
         <p:txBody>
-          <a:bodyPr wrap="square" anchor="t" lIns="0" rIns="0" tIns="0" bIns="0">
+          <a:bodyPr wrap="square" lIns="0" tIns="0" rIns="0" bIns="0" anchor="t">
             <a:spAutoFit/>
           </a:bodyPr>
           <a:lstStyle/>
@@ -3516,6 +3986,7 @@
           <a:lstStyle/>
           <a:p>
             <a:pPr algn="ctr"/>
+            <a:endParaRPr/>
           </a:p>
         </p:txBody>
       </p:sp>
@@ -3536,7 +4007,7 @@
           <a:noFill/>
         </p:spPr>
         <p:txBody>
-          <a:bodyPr wrap="square" anchor="ctr" lIns="0" rIns="0" tIns="0" bIns="0">
+          <a:bodyPr wrap="square" lIns="0" tIns="0" rIns="0" bIns="0" anchor="ctr">
             <a:spAutoFit/>
           </a:bodyPr>
           <a:lstStyle/>
@@ -3575,7 +4046,7 @@
           <a:noFill/>
         </p:spPr>
         <p:txBody>
-          <a:bodyPr wrap="square" anchor="ctr" lIns="0" rIns="0" tIns="0" bIns="0">
+          <a:bodyPr wrap="square" lIns="0" tIns="0" rIns="0" bIns="0" anchor="ctr">
             <a:spAutoFit/>
           </a:bodyPr>
           <a:lstStyle/>
@@ -3638,6 +4109,7 @@
           <a:lstStyle/>
           <a:p>
             <a:pPr algn="ctr"/>
+            <a:endParaRPr/>
           </a:p>
         </p:txBody>
       </p:sp>
@@ -3658,7 +4130,7 @@
           <a:noFill/>
         </p:spPr>
         <p:txBody>
-          <a:bodyPr wrap="square" anchor="ctr" lIns="0" rIns="0" tIns="0" bIns="0">
+          <a:bodyPr wrap="square" lIns="0" tIns="0" rIns="0" bIns="0" anchor="ctr">
             <a:spAutoFit/>
           </a:bodyPr>
           <a:lstStyle/>
@@ -3697,7 +4169,7 @@
           <a:noFill/>
         </p:spPr>
         <p:txBody>
-          <a:bodyPr wrap="square" anchor="ctr" lIns="0" rIns="0" tIns="0" bIns="0">
+          <a:bodyPr wrap="square" lIns="0" tIns="0" rIns="0" bIns="0" anchor="ctr">
             <a:spAutoFit/>
           </a:bodyPr>
           <a:lstStyle/>
@@ -3760,6 +4232,7 @@
           <a:lstStyle/>
           <a:p>
             <a:pPr algn="ctr"/>
+            <a:endParaRPr/>
           </a:p>
         </p:txBody>
       </p:sp>
@@ -3780,7 +4253,7 @@
           <a:noFill/>
         </p:spPr>
         <p:txBody>
-          <a:bodyPr wrap="square" anchor="ctr" lIns="0" rIns="0" tIns="0" bIns="0">
+          <a:bodyPr wrap="square" lIns="0" tIns="0" rIns="0" bIns="0" anchor="ctr">
             <a:spAutoFit/>
           </a:bodyPr>
           <a:lstStyle/>
@@ -3819,7 +4292,7 @@
           <a:noFill/>
         </p:spPr>
         <p:txBody>
-          <a:bodyPr wrap="square" anchor="ctr" lIns="0" rIns="0" tIns="0" bIns="0">
+          <a:bodyPr wrap="square" lIns="0" tIns="0" rIns="0" bIns="0" anchor="ctr">
             <a:spAutoFit/>
           </a:bodyPr>
           <a:lstStyle/>
@@ -3882,6 +4355,7 @@
           <a:lstStyle/>
           <a:p>
             <a:pPr algn="ctr"/>
+            <a:endParaRPr/>
           </a:p>
         </p:txBody>
       </p:sp>
@@ -3902,7 +4376,7 @@
           <a:noFill/>
         </p:spPr>
         <p:txBody>
-          <a:bodyPr wrap="square" anchor="ctr" lIns="0" rIns="0" tIns="0" bIns="0">
+          <a:bodyPr wrap="square" lIns="0" tIns="0" rIns="0" bIns="0" anchor="ctr">
             <a:spAutoFit/>
           </a:bodyPr>
           <a:lstStyle/>
@@ -3941,7 +4415,7 @@
           <a:noFill/>
         </p:spPr>
         <p:txBody>
-          <a:bodyPr wrap="square" anchor="ctr" lIns="0" rIns="0" tIns="0" bIns="0">
+          <a:bodyPr wrap="square" lIns="0" tIns="0" rIns="0" bIns="0" anchor="ctr">
             <a:spAutoFit/>
           </a:bodyPr>
           <a:lstStyle/>
@@ -4004,6 +4478,7 @@
           <a:lstStyle/>
           <a:p>
             <a:pPr algn="ctr"/>
+            <a:endParaRPr/>
           </a:p>
         </p:txBody>
       </p:sp>
@@ -4024,7 +4499,7 @@
           <a:noFill/>
         </p:spPr>
         <p:txBody>
-          <a:bodyPr wrap="square" anchor="ctr" lIns="0" rIns="0" tIns="0" bIns="0">
+          <a:bodyPr wrap="square" lIns="0" tIns="0" rIns="0" bIns="0" anchor="ctr">
             <a:spAutoFit/>
           </a:bodyPr>
           <a:lstStyle/>
@@ -4063,7 +4538,7 @@
           <a:noFill/>
         </p:spPr>
         <p:txBody>
-          <a:bodyPr wrap="square" anchor="ctr" lIns="0" rIns="0" tIns="0" bIns="0">
+          <a:bodyPr wrap="square" lIns="0" tIns="0" rIns="0" bIns="0" anchor="ctr">
             <a:spAutoFit/>
           </a:bodyPr>
           <a:lstStyle/>
@@ -4126,6 +4601,7 @@
           <a:lstStyle/>
           <a:p>
             <a:pPr algn="ctr"/>
+            <a:endParaRPr/>
           </a:p>
         </p:txBody>
       </p:sp>
@@ -4146,7 +4622,7 @@
           <a:noFill/>
         </p:spPr>
         <p:txBody>
-          <a:bodyPr wrap="square" anchor="ctr" lIns="0" rIns="0" tIns="0" bIns="0">
+          <a:bodyPr wrap="square" lIns="0" tIns="0" rIns="0" bIns="0" anchor="ctr">
             <a:spAutoFit/>
           </a:bodyPr>
           <a:lstStyle/>
@@ -4185,7 +4661,7 @@
           <a:noFill/>
         </p:spPr>
         <p:txBody>
-          <a:bodyPr wrap="square" anchor="ctr" lIns="0" rIns="0" tIns="0" bIns="0">
+          <a:bodyPr wrap="square" lIns="0" tIns="0" rIns="0" bIns="0" anchor="ctr">
             <a:spAutoFit/>
           </a:bodyPr>
           <a:lstStyle/>
@@ -4248,6 +4724,7 @@
           <a:lstStyle/>
           <a:p>
             <a:pPr algn="ctr"/>
+            <a:endParaRPr/>
           </a:p>
         </p:txBody>
       </p:sp>
@@ -4268,7 +4745,7 @@
           <a:noFill/>
         </p:spPr>
         <p:txBody>
-          <a:bodyPr wrap="square" anchor="ctr" lIns="0" rIns="0" tIns="0" bIns="0">
+          <a:bodyPr wrap="square" lIns="0" tIns="0" rIns="0" bIns="0" anchor="ctr">
             <a:spAutoFit/>
           </a:bodyPr>
           <a:lstStyle/>
@@ -4307,7 +4784,7 @@
           <a:noFill/>
         </p:spPr>
         <p:txBody>
-          <a:bodyPr wrap="square" anchor="ctr" lIns="0" rIns="0" tIns="0" bIns="0">
+          <a:bodyPr wrap="square" lIns="0" tIns="0" rIns="0" bIns="0" anchor="ctr">
             <a:spAutoFit/>
           </a:bodyPr>
           <a:lstStyle/>
@@ -4370,6 +4847,7 @@
           <a:lstStyle/>
           <a:p>
             <a:pPr algn="ctr"/>
+            <a:endParaRPr/>
           </a:p>
         </p:txBody>
       </p:sp>
@@ -4390,7 +4868,7 @@
           <a:noFill/>
         </p:spPr>
         <p:txBody>
-          <a:bodyPr wrap="square" anchor="ctr" lIns="0" rIns="0" tIns="0" bIns="0">
+          <a:bodyPr wrap="square" lIns="0" tIns="0" rIns="0" bIns="0" anchor="ctr">
             <a:spAutoFit/>
           </a:bodyPr>
           <a:lstStyle/>
@@ -4429,7 +4907,7 @@
           <a:noFill/>
         </p:spPr>
         <p:txBody>
-          <a:bodyPr wrap="square" anchor="ctr" lIns="0" rIns="0" tIns="0" bIns="0">
+          <a:bodyPr wrap="square" lIns="0" tIns="0" rIns="0" bIns="0" anchor="ctr">
             <a:spAutoFit/>
           </a:bodyPr>
           <a:lstStyle/>
@@ -4492,6 +4970,7 @@
           <a:lstStyle/>
           <a:p>
             <a:pPr algn="ctr"/>
+            <a:endParaRPr/>
           </a:p>
         </p:txBody>
       </p:sp>
@@ -4512,7 +4991,7 @@
           <a:noFill/>
         </p:spPr>
         <p:txBody>
-          <a:bodyPr wrap="square" anchor="ctr" lIns="0" rIns="0" tIns="0" bIns="0">
+          <a:bodyPr wrap="square" lIns="0" tIns="0" rIns="0" bIns="0" anchor="ctr">
             <a:spAutoFit/>
           </a:bodyPr>
           <a:lstStyle/>
@@ -4551,7 +5030,7 @@
           <a:noFill/>
         </p:spPr>
         <p:txBody>
-          <a:bodyPr wrap="square" anchor="ctr" lIns="0" rIns="0" tIns="0" bIns="0">
+          <a:bodyPr wrap="square" lIns="0" tIns="0" rIns="0" bIns="0" anchor="ctr">
             <a:spAutoFit/>
           </a:bodyPr>
           <a:lstStyle/>
@@ -4595,6 +5074,16 @@
           <a:prstGeom prst="rect">
             <a:avLst/>
           </a:prstGeom>
+          <a:ln>
+            <a:noFill/>
+          </a:ln>
+          <a:effectLst>
+            <a:outerShdw blurRad="190500" algn="tl" rotWithShape="0">
+              <a:srgbClr val="000000">
+                <a:alpha val="70000"/>
+              </a:srgbClr>
+            </a:outerShdw>
+          </a:effectLst>
         </p:spPr>
       </p:pic>
       <p:sp>
@@ -4638,6 +5127,7 @@
           <a:lstStyle/>
           <a:p>
             <a:pPr algn="ctr"/>
+            <a:endParaRPr/>
           </a:p>
         </p:txBody>
       </p:sp>
@@ -4658,7 +5148,7 @@
           <a:noFill/>
         </p:spPr>
         <p:txBody>
-          <a:bodyPr wrap="square" anchor="t" lIns="0" rIns="0" tIns="0" bIns="0">
+          <a:bodyPr wrap="square" lIns="0" tIns="0" rIns="0" bIns="0" anchor="t">
             <a:spAutoFit/>
           </a:bodyPr>
           <a:lstStyle/>
@@ -4697,7 +5187,7 @@
           <a:noFill/>
         </p:spPr>
         <p:txBody>
-          <a:bodyPr wrap="square" anchor="t" lIns="0" rIns="0" tIns="0" bIns="0">
+          <a:bodyPr wrap="square" lIns="0" tIns="0" rIns="0" bIns="0" anchor="t">
             <a:spAutoFit/>
           </a:bodyPr>
           <a:lstStyle/>
@@ -4728,7 +5218,7 @@
 </file>
 
 <file path=ppt/slides/slide3.xml><?xml version="1.0" encoding="utf-8"?>
-<p:sld xmlns:a="http://schemas.openxmlformats.org/drawingml/2006/main" xmlns:p="http://schemas.openxmlformats.org/presentationml/2006/main" xmlns:r="http://schemas.openxmlformats.org/officeDocument/2006/relationships">
+<p:sld xmlns:a="http://schemas.openxmlformats.org/drawingml/2006/main" xmlns:r="http://schemas.openxmlformats.org/officeDocument/2006/relationships" xmlns:p="http://schemas.openxmlformats.org/presentationml/2006/main">
   <p:cSld>
     <p:spTree>
       <p:nvGrpSpPr>
@@ -4736,23 +5226,33 @@
         <p:cNvGrpSpPr/>
         <p:nvPr/>
       </p:nvGrpSpPr>
-      <p:grpSpPr/>
-      <p:sp>
-        <p:nvSpPr>
-          <p:cNvPr id="2" name="Rectangle 1"/>
+      <p:grpSpPr>
+        <a:xfrm>
+          <a:off x="0" y="0"/>
+          <a:ext cx="0" cy="0"/>
+          <a:chOff x="0" y="0"/>
+          <a:chExt cx="0" cy="0"/>
+        </a:xfrm>
+      </p:grpSpPr>
+      <p:sp>
+        <p:nvSpPr>
+          <p:cNvPr id="43" name="Rectangle 42"/>
           <p:cNvSpPr/>
           <p:nvPr/>
         </p:nvSpPr>
         <p:spPr>
           <a:xfrm>
-            <a:off x="0" y="0"/>
-            <a:ext cx="12191695" cy="6858000"/>
+            <a:off x="6210678" y="1627491"/>
+            <a:ext cx="5752165" cy="3421280"/>
           </a:xfrm>
           <a:prstGeom prst="rect">
             <a:avLst/>
           </a:prstGeom>
           <a:solidFill>
-            <a:srgbClr val="FFFFFF"/>
+            <a:schemeClr val="accent1">
+              <a:lumMod val="20000"/>
+              <a:lumOff val="80000"/>
+            </a:schemeClr>
           </a:solidFill>
           <a:ln>
             <a:noFill/>
@@ -4778,6 +5278,55 @@
           <a:lstStyle/>
           <a:p>
             <a:pPr algn="ctr"/>
+            <a:endParaRPr/>
+          </a:p>
+        </p:txBody>
+      </p:sp>
+      <p:sp>
+        <p:nvSpPr>
+          <p:cNvPr id="2" name="Rectangle 1"/>
+          <p:cNvSpPr/>
+          <p:nvPr/>
+        </p:nvSpPr>
+        <p:spPr>
+          <a:xfrm>
+            <a:off x="402942" y="1645920"/>
+            <a:ext cx="5752165" cy="3421280"/>
+          </a:xfrm>
+          <a:prstGeom prst="rect">
+            <a:avLst/>
+          </a:prstGeom>
+          <a:solidFill>
+            <a:schemeClr val="accent3">
+              <a:lumMod val="20000"/>
+              <a:lumOff val="80000"/>
+            </a:schemeClr>
+          </a:solidFill>
+          <a:ln>
+            <a:noFill/>
+          </a:ln>
+          <a:effectLst/>
+        </p:spPr>
+        <p:style>
+          <a:lnRef idx="1">
+            <a:schemeClr val="accent1"/>
+          </a:lnRef>
+          <a:fillRef idx="3">
+            <a:schemeClr val="accent1"/>
+          </a:fillRef>
+          <a:effectRef idx="2">
+            <a:schemeClr val="accent1"/>
+          </a:effectRef>
+          <a:fontRef idx="minor">
+            <a:schemeClr val="lt1"/>
+          </a:fontRef>
+        </p:style>
+        <p:txBody>
+          <a:bodyPr rtlCol="0" anchor="ctr"/>
+          <a:lstStyle/>
+          <a:p>
+            <a:pPr algn="ctr"/>
+            <a:endParaRPr/>
           </a:p>
         </p:txBody>
       </p:sp>
@@ -4851,7 +5400,7 @@
           <a:noFill/>
         </p:spPr>
         <p:txBody>
-          <a:bodyPr wrap="square" anchor="ctr" lIns="0" rIns="0" tIns="0" bIns="0">
+          <a:bodyPr wrap="square" lIns="0" tIns="0" rIns="0" bIns="0" anchor="ctr">
             <a:spAutoFit/>
           </a:bodyPr>
           <a:lstStyle/>
@@ -4882,7 +5431,7 @@
           <p:nvPr/>
         </p:nvPicPr>
         <p:blipFill>
-          <a:blip r:embed="rId2"/>
+          <a:blip r:embed="rId3"/>
           <a:stretch>
             <a:fillRect/>
           </a:stretch>
@@ -4938,6 +5487,7 @@
           <a:lstStyle/>
           <a:p>
             <a:pPr algn="ctr"/>
+            <a:endParaRPr/>
           </a:p>
         </p:txBody>
       </p:sp>
@@ -4949,7 +5499,7 @@
         </p:nvSpPr>
         <p:spPr>
           <a:xfrm>
-            <a:off x="548640" y="1371600"/>
+            <a:off x="548640" y="1320928"/>
             <a:ext cx="11064240" cy="457200"/>
           </a:xfrm>
           <a:prstGeom prst="rect">
@@ -4958,7 +5508,7 @@
           <a:noFill/>
         </p:spPr>
         <p:txBody>
-          <a:bodyPr wrap="square" anchor="t" lIns="0" rIns="0" tIns="0" bIns="0">
+          <a:bodyPr wrap="square" lIns="0" tIns="0" rIns="0" bIns="0" anchor="t">
             <a:spAutoFit/>
           </a:bodyPr>
           <a:lstStyle/>
@@ -4969,7 +5519,7 @@
               </a:spcAft>
             </a:pPr>
             <a:r>
-              <a:rPr sz="1500" b="1">
+              <a:rPr sz="1500" b="1" dirty="0">
                 <a:solidFill>
                   <a:srgbClr val="0F172A"/>
                 </a:solidFill>
@@ -4980,690 +5530,550 @@
           </a:p>
         </p:txBody>
       </p:sp>
-      <p:sp>
-        <p:nvSpPr>
-          <p:cNvPr id="8" name="Rounded Rectangle 7"/>
-          <p:cNvSpPr/>
-          <p:nvPr/>
-        </p:nvSpPr>
-        <p:spPr>
-          <a:xfrm>
-            <a:off x="548640" y="1965960"/>
-            <a:ext cx="3611880" cy="2834640"/>
-          </a:xfrm>
-          <a:prstGeom prst="roundRect">
-            <a:avLst>
-              <a:gd name="adj" fmla="val 6000"/>
-            </a:avLst>
-          </a:prstGeom>
-          <a:solidFill>
-            <a:srgbClr val="ECFDF5"/>
-          </a:solidFill>
-          <a:ln w="12700">
+      <p:grpSp>
+        <p:nvGrpSpPr>
+          <p:cNvPr id="25" name="Group 24"/>
+          <p:cNvGrpSpPr/>
+          <p:nvPr/>
+        </p:nvGrpSpPr>
+        <p:grpSpPr>
+          <a:xfrm>
+            <a:off x="504636" y="2057441"/>
+            <a:ext cx="2693324" cy="2834640"/>
+            <a:chOff x="548640" y="1965960"/>
+            <a:chExt cx="2693324" cy="2834640"/>
+          </a:xfrm>
+        </p:grpSpPr>
+        <p:sp>
+          <p:nvSpPr>
+            <p:cNvPr id="8" name="Rounded Rectangle 7"/>
+            <p:cNvSpPr/>
+            <p:nvPr/>
+          </p:nvSpPr>
+          <p:spPr>
+            <a:xfrm>
+              <a:off x="548640" y="1965960"/>
+              <a:ext cx="2693324" cy="2834640"/>
+            </a:xfrm>
+            <a:prstGeom prst="roundRect">
+              <a:avLst>
+                <a:gd name="adj" fmla="val 6000"/>
+              </a:avLst>
+            </a:prstGeom>
             <a:solidFill>
-              <a:srgbClr val="BBF7D0"/>
+              <a:srgbClr val="ECFDF5"/>
             </a:solidFill>
-          </a:ln>
-          <a:effectLst/>
-        </p:spPr>
-        <p:style>
-          <a:lnRef idx="1">
-            <a:schemeClr val="accent1"/>
-          </a:lnRef>
-          <a:fillRef idx="3">
-            <a:schemeClr val="accent1"/>
-          </a:fillRef>
-          <a:effectRef idx="2">
-            <a:schemeClr val="accent1"/>
-          </a:effectRef>
-          <a:fontRef idx="minor">
-            <a:schemeClr val="lt1"/>
-          </a:fontRef>
-        </p:style>
-        <p:txBody>
-          <a:bodyPr rtlCol="0" anchor="ctr"/>
-          <a:lstStyle/>
-          <a:p>
-            <a:pPr algn="ctr"/>
-          </a:p>
-        </p:txBody>
-      </p:sp>
-      <p:sp>
-        <p:nvSpPr>
-          <p:cNvPr id="9" name="TextBox 8"/>
-          <p:cNvSpPr txBox="1"/>
-          <p:nvPr/>
-        </p:nvSpPr>
-        <p:spPr>
-          <a:xfrm>
-            <a:off x="749808" y="2130552"/>
-            <a:ext cx="3200400" cy="457200"/>
-          </a:xfrm>
-          <a:prstGeom prst="rect">
-            <a:avLst/>
-          </a:prstGeom>
-          <a:noFill/>
-        </p:spPr>
-        <p:txBody>
-          <a:bodyPr wrap="square" anchor="t" lIns="0" rIns="0" tIns="0" bIns="0">
-            <a:spAutoFit/>
-          </a:bodyPr>
-          <a:lstStyle/>
-          <a:p>
-            <a:pPr algn="l">
-              <a:spcAft>
-                <a:spcPts val="400"/>
-              </a:spcAft>
-            </a:pPr>
-            <a:r>
-              <a:rPr sz="1300" b="1">
-                <a:solidFill>
-                  <a:srgbClr val="16A34A"/>
-                </a:solidFill>
-                <a:latin typeface="Calibri"/>
-              </a:rPr>
-              <a:t>✓  Working in the browser</a:t>
-            </a:r>
-          </a:p>
-        </p:txBody>
-      </p:sp>
-      <p:sp>
-        <p:nvSpPr>
-          <p:cNvPr id="10" name="TextBox 9"/>
-          <p:cNvSpPr txBox="1"/>
-          <p:nvPr/>
-        </p:nvSpPr>
-        <p:spPr>
-          <a:xfrm>
-            <a:off x="749808" y="2651760"/>
-            <a:ext cx="3200400" cy="2011680"/>
-          </a:xfrm>
-          <a:prstGeom prst="rect">
-            <a:avLst/>
-          </a:prstGeom>
-          <a:noFill/>
-        </p:spPr>
-        <p:txBody>
-          <a:bodyPr wrap="square" lIns="0" tIns="0">
-            <a:spAutoFit/>
-          </a:bodyPr>
-          <a:lstStyle/>
-          <a:p>
-            <a:pPr>
-              <a:lnSpc>
-                <a:spcPct val="105000"/>
-              </a:lnSpc>
-              <a:spcAft>
-                <a:spcPts val="800"/>
-              </a:spcAft>
-            </a:pPr>
-            <a:r>
-              <a:rPr sz="700">
-                <a:solidFill>
-                  <a:srgbClr val="16A34A"/>
-                </a:solidFill>
-                <a:latin typeface="Calibri"/>
-              </a:rPr>
-              <a:t>•  </a:t>
-            </a:r>
-            <a:r>
-              <a:rPr sz="1100">
+            <a:ln w="12700">
+              <a:solidFill>
+                <a:srgbClr val="BBF7D0"/>
+              </a:solidFill>
+            </a:ln>
+            <a:effectLst/>
+          </p:spPr>
+          <p:style>
+            <a:lnRef idx="1">
+              <a:schemeClr val="accent1"/>
+            </a:lnRef>
+            <a:fillRef idx="3">
+              <a:schemeClr val="accent1"/>
+            </a:fillRef>
+            <a:effectRef idx="2">
+              <a:schemeClr val="accent1"/>
+            </a:effectRef>
+            <a:fontRef idx="minor">
+              <a:schemeClr val="lt1"/>
+            </a:fontRef>
+          </p:style>
+          <p:txBody>
+            <a:bodyPr rtlCol="0" anchor="ctr"/>
+            <a:lstStyle/>
+            <a:p>
+              <a:pPr algn="ctr"/>
+              <a:endParaRPr/>
+            </a:p>
+          </p:txBody>
+        </p:sp>
+        <p:sp>
+          <p:nvSpPr>
+            <p:cNvPr id="9" name="TextBox 8"/>
+            <p:cNvSpPr txBox="1"/>
+            <p:nvPr/>
+          </p:nvSpPr>
+          <p:spPr>
+            <a:xfrm>
+              <a:off x="749808" y="2130552"/>
+              <a:ext cx="2180428" cy="200055"/>
+            </a:xfrm>
+            <a:prstGeom prst="rect">
+              <a:avLst/>
+            </a:prstGeom>
+            <a:noFill/>
+          </p:spPr>
+          <p:txBody>
+            <a:bodyPr wrap="square" lIns="0" tIns="0" rIns="0" bIns="0" anchor="t">
+              <a:spAutoFit/>
+            </a:bodyPr>
+            <a:lstStyle/>
+            <a:p>
+              <a:pPr algn="l">
+                <a:spcAft>
+                  <a:spcPts val="400"/>
+                </a:spcAft>
+              </a:pPr>
+              <a:r>
+                <a:rPr sz="1300" b="1" dirty="0">
+                  <a:solidFill>
+                    <a:srgbClr val="16A34A"/>
+                  </a:solidFill>
+                  <a:latin typeface="Calibri"/>
+                </a:rPr>
+                <a:t>✓  Working in the browser</a:t>
+              </a:r>
+            </a:p>
+          </p:txBody>
+        </p:sp>
+        <p:sp>
+          <p:nvSpPr>
+            <p:cNvPr id="10" name="TextBox 9"/>
+            <p:cNvSpPr txBox="1"/>
+            <p:nvPr/>
+          </p:nvSpPr>
+          <p:spPr>
+            <a:xfrm>
+              <a:off x="720896" y="2587752"/>
+              <a:ext cx="2273847" cy="1317797"/>
+            </a:xfrm>
+            <a:prstGeom prst="rect">
+              <a:avLst/>
+            </a:prstGeom>
+            <a:noFill/>
+          </p:spPr>
+          <p:txBody>
+            <a:bodyPr wrap="square" lIns="0" tIns="0">
+              <a:spAutoFit/>
+            </a:bodyPr>
+            <a:lstStyle/>
+            <a:p>
+              <a:pPr>
+                <a:lnSpc>
+                  <a:spcPct val="105000"/>
+                </a:lnSpc>
+                <a:spcAft>
+                  <a:spcPts val="800"/>
+                </a:spcAft>
+              </a:pPr>
+              <a:r>
+                <a:rPr sz="700" dirty="0">
+                  <a:solidFill>
+                    <a:srgbClr val="16A34A"/>
+                  </a:solidFill>
+                  <a:latin typeface="Calibri"/>
+                </a:rPr>
+                <a:t>•  </a:t>
+              </a:r>
+              <a:r>
+                <a:rPr sz="1100" dirty="0">
+                  <a:solidFill>
+                    <a:srgbClr val="475569"/>
+                  </a:solidFill>
+                  <a:latin typeface="Calibri"/>
+                </a:rPr>
+                <a:t>TensorFlow.js COCO-SSD on webcam / uploaded photos</a:t>
+              </a:r>
+            </a:p>
+            <a:p>
+              <a:pPr>
+                <a:lnSpc>
+                  <a:spcPct val="105000"/>
+                </a:lnSpc>
+                <a:spcAft>
+                  <a:spcPts val="800"/>
+                </a:spcAft>
+              </a:pPr>
+              <a:r>
+                <a:rPr sz="700" dirty="0">
+                  <a:solidFill>
+                    <a:srgbClr val="16A34A"/>
+                  </a:solidFill>
+                  <a:latin typeface="Calibri"/>
+                </a:rPr>
+                <a:t>•  </a:t>
+              </a:r>
+              <a:r>
+                <a:rPr sz="1100" dirty="0" smtClean="0">
+                  <a:solidFill>
+                    <a:srgbClr val="475569"/>
+                  </a:solidFill>
+                  <a:latin typeface="Calibri"/>
+                </a:rPr>
+                <a:t>Green Points wallet, redemption &amp; fee offset</a:t>
+              </a:r>
+            </a:p>
+            <a:p>
+              <a:pPr>
+                <a:lnSpc>
+                  <a:spcPct val="105000"/>
+                </a:lnSpc>
+                <a:spcAft>
+                  <a:spcPts val="800"/>
+                </a:spcAft>
+              </a:pPr>
+              <a:r>
+                <a:rPr sz="700" dirty="0" smtClean="0">
+                  <a:solidFill>
+                    <a:srgbClr val="16A34A"/>
+                  </a:solidFill>
+                  <a:latin typeface="Calibri"/>
+                </a:rPr>
+                <a:t>•  </a:t>
+              </a:r>
+              <a:r>
+                <a:rPr sz="1100" dirty="0" smtClean="0">
+                  <a:solidFill>
+                    <a:srgbClr val="475569"/>
+                  </a:solidFill>
+                  <a:latin typeface="Calibri"/>
+                </a:rPr>
+                <a:t>Dispatch sim on real roads (OSRM) + 6-hub map</a:t>
+              </a:r>
+              <a:endParaRPr sz="1100" dirty="0">
                 <a:solidFill>
                   <a:srgbClr val="475569"/>
                 </a:solidFill>
                 <a:latin typeface="Calibri"/>
-              </a:rPr>
-              <a:t>TensorFlow.js COCO-SSD on webcam / uploaded photos</a:t>
-            </a:r>
-          </a:p>
-          <a:p>
-            <a:pPr>
-              <a:lnSpc>
-                <a:spcPct val="105000"/>
-              </a:lnSpc>
-              <a:spcAft>
-                <a:spcPts val="800"/>
-              </a:spcAft>
-            </a:pPr>
-            <a:r>
-              <a:rPr sz="700">
-                <a:solidFill>
-                  <a:srgbClr val="16A34A"/>
-                </a:solidFill>
-                <a:latin typeface="Calibri"/>
-              </a:rPr>
-              <a:t>•  </a:t>
-            </a:r>
-            <a:r>
-              <a:rPr sz="1100">
-                <a:solidFill>
-                  <a:srgbClr val="475569"/>
-                </a:solidFill>
-                <a:latin typeface="Calibri"/>
-              </a:rPr>
-              <a:t>Green Points wallet, redemption &amp; fee offset</a:t>
-            </a:r>
-          </a:p>
-          <a:p>
-            <a:pPr>
-              <a:lnSpc>
-                <a:spcPct val="105000"/>
-              </a:lnSpc>
-              <a:spcAft>
-                <a:spcPts val="800"/>
-              </a:spcAft>
-            </a:pPr>
-            <a:r>
-              <a:rPr sz="700">
-                <a:solidFill>
-                  <a:srgbClr val="16A34A"/>
-                </a:solidFill>
-                <a:latin typeface="Calibri"/>
-              </a:rPr>
-              <a:t>•  </a:t>
-            </a:r>
-            <a:r>
-              <a:rPr sz="1100">
-                <a:solidFill>
-                  <a:srgbClr val="475569"/>
-                </a:solidFill>
-                <a:latin typeface="Calibri"/>
-              </a:rPr>
-              <a:t>Dispatch sim on real roads (OSRM) + 6-hub map</a:t>
-            </a:r>
-          </a:p>
-        </p:txBody>
-      </p:sp>
-      <p:sp>
-        <p:nvSpPr>
-          <p:cNvPr id="11" name="Rounded Rectangle 10"/>
-          <p:cNvSpPr/>
-          <p:nvPr/>
-        </p:nvSpPr>
-        <p:spPr>
-          <a:xfrm>
-            <a:off x="4251960" y="1965960"/>
-            <a:ext cx="3611880" cy="2834640"/>
-          </a:xfrm>
-          <a:prstGeom prst="roundRect">
-            <a:avLst>
-              <a:gd name="adj" fmla="val 6000"/>
-            </a:avLst>
-          </a:prstGeom>
-          <a:solidFill>
-            <a:srgbClr val="FEF3E2"/>
-          </a:solidFill>
-          <a:ln w="12700">
+              </a:endParaRPr>
+            </a:p>
+          </p:txBody>
+        </p:sp>
+      </p:grpSp>
+      <p:grpSp>
+        <p:nvGrpSpPr>
+          <p:cNvPr id="31" name="Group 30"/>
+          <p:cNvGrpSpPr/>
+          <p:nvPr/>
+        </p:nvGrpSpPr>
+        <p:grpSpPr>
+          <a:xfrm>
+            <a:off x="9141943" y="2069363"/>
+            <a:ext cx="2693324" cy="2834640"/>
+            <a:chOff x="6080760" y="1912022"/>
+            <a:chExt cx="2693324" cy="2834640"/>
+          </a:xfrm>
+        </p:grpSpPr>
+        <p:sp>
+          <p:nvSpPr>
+            <p:cNvPr id="14" name="Rounded Rectangle 13"/>
+            <p:cNvSpPr/>
+            <p:nvPr/>
+          </p:nvSpPr>
+          <p:spPr>
+            <a:xfrm>
+              <a:off x="6080760" y="1912022"/>
+              <a:ext cx="2693324" cy="2834640"/>
+            </a:xfrm>
+            <a:prstGeom prst="roundRect">
+              <a:avLst>
+                <a:gd name="adj" fmla="val 6000"/>
+              </a:avLst>
+            </a:prstGeom>
             <a:solidFill>
-              <a:srgbClr val="F59E0B"/>
+              <a:srgbClr val="FEE2E8"/>
             </a:solidFill>
-          </a:ln>
-          <a:effectLst/>
-        </p:spPr>
-        <p:style>
-          <a:lnRef idx="1">
-            <a:schemeClr val="accent1"/>
-          </a:lnRef>
-          <a:fillRef idx="3">
-            <a:schemeClr val="accent1"/>
-          </a:fillRef>
-          <a:effectRef idx="2">
-            <a:schemeClr val="accent1"/>
-          </a:effectRef>
-          <a:fontRef idx="minor">
-            <a:schemeClr val="lt1"/>
-          </a:fontRef>
-        </p:style>
-        <p:txBody>
-          <a:bodyPr rtlCol="0" anchor="ctr"/>
-          <a:lstStyle/>
-          <a:p>
-            <a:pPr algn="ctr"/>
-          </a:p>
-        </p:txBody>
-      </p:sp>
-      <p:sp>
-        <p:nvSpPr>
-          <p:cNvPr id="12" name="TextBox 11"/>
-          <p:cNvSpPr txBox="1"/>
-          <p:nvPr/>
-        </p:nvSpPr>
-        <p:spPr>
-          <a:xfrm>
-            <a:off x="4453128" y="2130552"/>
-            <a:ext cx="3200400" cy="457200"/>
-          </a:xfrm>
-          <a:prstGeom prst="rect">
-            <a:avLst/>
-          </a:prstGeom>
-          <a:noFill/>
-        </p:spPr>
-        <p:txBody>
-          <a:bodyPr wrap="square" anchor="t" lIns="0" rIns="0" tIns="0" bIns="0">
-            <a:spAutoFit/>
-          </a:bodyPr>
-          <a:lstStyle/>
-          <a:p>
-            <a:pPr algn="l">
-              <a:spcAft>
-                <a:spcPts val="400"/>
-              </a:spcAft>
-            </a:pPr>
-            <a:r>
-              <a:rPr sz="1300" b="1">
-                <a:solidFill>
-                  <a:srgbClr val="F97316"/>
-                </a:solidFill>
-                <a:latin typeface="Calibri"/>
-              </a:rPr>
-              <a:t>~  Simulated in the prototype</a:t>
-            </a:r>
-          </a:p>
-        </p:txBody>
-      </p:sp>
-      <p:sp>
-        <p:nvSpPr>
-          <p:cNvPr id="13" name="TextBox 12"/>
-          <p:cNvSpPr txBox="1"/>
-          <p:nvPr/>
-        </p:nvSpPr>
-        <p:spPr>
-          <a:xfrm>
-            <a:off x="4453128" y="2651760"/>
-            <a:ext cx="3200400" cy="2011680"/>
-          </a:xfrm>
-          <a:prstGeom prst="rect">
-            <a:avLst/>
-          </a:prstGeom>
-          <a:noFill/>
-        </p:spPr>
-        <p:txBody>
-          <a:bodyPr wrap="square" lIns="0" tIns="0">
-            <a:spAutoFit/>
-          </a:bodyPr>
-          <a:lstStyle/>
-          <a:p>
-            <a:pPr>
-              <a:lnSpc>
-                <a:spcPct val="105000"/>
-              </a:lnSpc>
-              <a:spcAft>
-                <a:spcPts val="800"/>
-              </a:spcAft>
-            </a:pPr>
-            <a:r>
-              <a:rPr sz="700">
-                <a:solidFill>
-                  <a:srgbClr val="F97316"/>
-                </a:solidFill>
-                <a:latin typeface="Calibri"/>
-              </a:rPr>
-              <a:t>•  </a:t>
-            </a:r>
-            <a:r>
-              <a:rPr sz="1100">
-                <a:solidFill>
-                  <a:srgbClr val="475569"/>
-                </a:solidFill>
-                <a:latin typeface="Calibri"/>
-              </a:rPr>
-              <a:t>Bin fill levels &amp; sensor weights (demo values)</a:t>
-            </a:r>
-          </a:p>
-          <a:p>
-            <a:pPr>
-              <a:lnSpc>
-                <a:spcPct val="105000"/>
-              </a:lnSpc>
-              <a:spcAft>
-                <a:spcPts val="800"/>
-              </a:spcAft>
-            </a:pPr>
-            <a:r>
-              <a:rPr sz="700">
-                <a:solidFill>
-                  <a:srgbClr val="F97316"/>
-                </a:solidFill>
-                <a:latin typeface="Calibri"/>
-              </a:rPr>
-              <a:t>•  </a:t>
-            </a:r>
-            <a:r>
-              <a:rPr sz="1100">
-                <a:solidFill>
-                  <a:srgbClr val="475569"/>
-                </a:solidFill>
-                <a:latin typeface="Calibri"/>
-              </a:rPr>
-              <a:t>Two-camera cheat check (entry vs inside)</a:t>
-            </a:r>
-          </a:p>
-          <a:p>
-            <a:pPr>
-              <a:lnSpc>
-                <a:spcPct val="105000"/>
-              </a:lnSpc>
-              <a:spcAft>
-                <a:spcPts val="800"/>
-              </a:spcAft>
-            </a:pPr>
-            <a:r>
-              <a:rPr sz="700">
-                <a:solidFill>
-                  <a:srgbClr val="F97316"/>
-                </a:solidFill>
-                <a:latin typeface="Calibri"/>
-              </a:rPr>
-              <a:t>•  </a:t>
-            </a:r>
-            <a:r>
-              <a:rPr sz="1100">
-                <a:solidFill>
-                  <a:srgbClr val="475569"/>
-                </a:solidFill>
-                <a:latin typeface="Calibri"/>
-              </a:rPr>
-              <a:t>Township ROI from an indicative, tunable model</a:t>
-            </a:r>
-          </a:p>
-        </p:txBody>
-      </p:sp>
-      <p:sp>
-        <p:nvSpPr>
-          <p:cNvPr id="14" name="Rounded Rectangle 13"/>
-          <p:cNvSpPr/>
-          <p:nvPr/>
-        </p:nvSpPr>
-        <p:spPr>
-          <a:xfrm>
-            <a:off x="7955280" y="1965960"/>
-            <a:ext cx="3611880" cy="2834640"/>
-          </a:xfrm>
-          <a:prstGeom prst="roundRect">
-            <a:avLst>
-              <a:gd name="adj" fmla="val 6000"/>
-            </a:avLst>
-          </a:prstGeom>
-          <a:solidFill>
-            <a:srgbClr val="FEE2E8"/>
-          </a:solidFill>
-          <a:ln w="12700">
+            <a:ln w="12700">
+              <a:solidFill>
+                <a:srgbClr val="D31245"/>
+              </a:solidFill>
+            </a:ln>
+            <a:effectLst/>
+          </p:spPr>
+          <p:style>
+            <a:lnRef idx="1">
+              <a:schemeClr val="accent1"/>
+            </a:lnRef>
+            <a:fillRef idx="3">
+              <a:schemeClr val="accent1"/>
+            </a:fillRef>
+            <a:effectRef idx="2">
+              <a:schemeClr val="accent1"/>
+            </a:effectRef>
+            <a:fontRef idx="minor">
+              <a:schemeClr val="lt1"/>
+            </a:fontRef>
+          </p:style>
+          <p:txBody>
+            <a:bodyPr rtlCol="0" anchor="ctr"/>
+            <a:lstStyle/>
+            <a:p>
+              <a:pPr algn="ctr"/>
+              <a:endParaRPr/>
+            </a:p>
+          </p:txBody>
+        </p:sp>
+        <p:sp>
+          <p:nvSpPr>
+            <p:cNvPr id="15" name="TextBox 14"/>
+            <p:cNvSpPr txBox="1"/>
+            <p:nvPr/>
+          </p:nvSpPr>
+          <p:spPr>
+            <a:xfrm>
+              <a:off x="6584304" y="2127054"/>
+              <a:ext cx="1787652" cy="200055"/>
+            </a:xfrm>
+            <a:prstGeom prst="rect">
+              <a:avLst/>
+            </a:prstGeom>
+            <a:noFill/>
+          </p:spPr>
+          <p:txBody>
+            <a:bodyPr wrap="square" lIns="0" tIns="0" rIns="0" bIns="0" anchor="t">
+              <a:spAutoFit/>
+            </a:bodyPr>
+            <a:lstStyle/>
+            <a:p>
+              <a:pPr algn="l">
+                <a:spcAft>
+                  <a:spcPts val="400"/>
+                </a:spcAft>
+              </a:pPr>
+              <a:r>
+                <a:rPr sz="1300" b="1" dirty="0">
+                  <a:solidFill>
+                    <a:srgbClr val="D31245"/>
+                  </a:solidFill>
+                  <a:latin typeface="Calibri"/>
+                </a:rPr>
+                <a:t>!  Needs real-world build</a:t>
+              </a:r>
+            </a:p>
+          </p:txBody>
+        </p:sp>
+        <p:sp>
+          <p:nvSpPr>
+            <p:cNvPr id="16" name="TextBox 15"/>
+            <p:cNvSpPr txBox="1"/>
+            <p:nvPr/>
+          </p:nvSpPr>
+          <p:spPr>
+            <a:xfrm>
+              <a:off x="6239505" y="2541145"/>
+              <a:ext cx="2410552" cy="1317797"/>
+            </a:xfrm>
+            <a:prstGeom prst="rect">
+              <a:avLst/>
+            </a:prstGeom>
+            <a:noFill/>
+          </p:spPr>
+          <p:txBody>
+            <a:bodyPr wrap="square" lIns="0" tIns="0">
+              <a:spAutoFit/>
+            </a:bodyPr>
+            <a:lstStyle/>
+            <a:p>
+              <a:pPr>
+                <a:lnSpc>
+                  <a:spcPct val="105000"/>
+                </a:lnSpc>
+                <a:spcAft>
+                  <a:spcPts val="800"/>
+                </a:spcAft>
+              </a:pPr>
+              <a:r>
+                <a:rPr sz="700" dirty="0">
+                  <a:solidFill>
+                    <a:srgbClr val="D31245"/>
+                  </a:solidFill>
+                  <a:latin typeface="Calibri"/>
+                </a:rPr>
+                <a:t>•  </a:t>
+              </a:r>
+              <a:r>
+                <a:rPr sz="1100" dirty="0">
+                  <a:solidFill>
+                    <a:srgbClr val="475569"/>
+                  </a:solidFill>
+                  <a:latin typeface="Calibri"/>
+                </a:rPr>
+                <a:t>Recyclability/material classifier on real items</a:t>
+              </a:r>
+            </a:p>
+            <a:p>
+              <a:pPr>
+                <a:lnSpc>
+                  <a:spcPct val="105000"/>
+                </a:lnSpc>
+                <a:spcAft>
+                  <a:spcPts val="800"/>
+                </a:spcAft>
+              </a:pPr>
+              <a:r>
+                <a:rPr sz="700" dirty="0">
+                  <a:solidFill>
+                    <a:srgbClr val="D31245"/>
+                  </a:solidFill>
+                  <a:latin typeface="Calibri"/>
+                </a:rPr>
+                <a:t>•  </a:t>
+              </a:r>
+              <a:r>
+                <a:rPr sz="1100" dirty="0">
+                  <a:solidFill>
+                    <a:srgbClr val="475569"/>
+                  </a:solidFill>
+                  <a:latin typeface="Calibri"/>
+                </a:rPr>
+                <a:t>Physical smart-bin hardware + load cells</a:t>
+              </a:r>
+            </a:p>
+            <a:p>
+              <a:pPr>
+                <a:lnSpc>
+                  <a:spcPct val="105000"/>
+                </a:lnSpc>
+                <a:spcAft>
+                  <a:spcPts val="800"/>
+                </a:spcAft>
+              </a:pPr>
+              <a:r>
+                <a:rPr sz="700" dirty="0">
+                  <a:solidFill>
+                    <a:srgbClr val="D31245"/>
+                  </a:solidFill>
+                  <a:latin typeface="Calibri"/>
+                </a:rPr>
+                <a:t>•  </a:t>
+              </a:r>
+              <a:r>
+                <a:rPr sz="1100" dirty="0">
+                  <a:solidFill>
+                    <a:srgbClr val="475569"/>
+                  </a:solidFill>
+                  <a:latin typeface="Calibri"/>
+                </a:rPr>
+                <a:t>POS/voucher + identity + telemetry integration</a:t>
+              </a:r>
+            </a:p>
+          </p:txBody>
+        </p:sp>
+      </p:grpSp>
+      <p:grpSp>
+        <p:nvGrpSpPr>
+          <p:cNvPr id="42" name="Group 41"/>
+          <p:cNvGrpSpPr/>
+          <p:nvPr/>
+        </p:nvGrpSpPr>
+        <p:grpSpPr>
+          <a:xfrm>
+            <a:off x="375156" y="5233886"/>
+            <a:ext cx="11559901" cy="914400"/>
+            <a:chOff x="548640" y="5029200"/>
+            <a:chExt cx="11064240" cy="914400"/>
+          </a:xfrm>
+        </p:grpSpPr>
+        <p:sp>
+          <p:nvSpPr>
+            <p:cNvPr id="17" name="Rounded Rectangle 16"/>
+            <p:cNvSpPr/>
+            <p:nvPr/>
+          </p:nvSpPr>
+          <p:spPr>
+            <a:xfrm>
+              <a:off x="548640" y="5029200"/>
+              <a:ext cx="11064240" cy="914400"/>
+            </a:xfrm>
+            <a:prstGeom prst="roundRect">
+              <a:avLst>
+                <a:gd name="adj" fmla="val 6000"/>
+              </a:avLst>
+            </a:prstGeom>
             <a:solidFill>
-              <a:srgbClr val="D31245"/>
+              <a:srgbClr val="F8FAFC"/>
             </a:solidFill>
-          </a:ln>
-          <a:effectLst/>
-        </p:spPr>
-        <p:style>
-          <a:lnRef idx="1">
-            <a:schemeClr val="accent1"/>
-          </a:lnRef>
-          <a:fillRef idx="3">
-            <a:schemeClr val="accent1"/>
-          </a:fillRef>
-          <a:effectRef idx="2">
-            <a:schemeClr val="accent1"/>
-          </a:effectRef>
-          <a:fontRef idx="minor">
-            <a:schemeClr val="lt1"/>
-          </a:fontRef>
-        </p:style>
-        <p:txBody>
-          <a:bodyPr rtlCol="0" anchor="ctr"/>
-          <a:lstStyle/>
-          <a:p>
-            <a:pPr algn="ctr"/>
-          </a:p>
-        </p:txBody>
-      </p:sp>
-      <p:sp>
-        <p:nvSpPr>
-          <p:cNvPr id="15" name="TextBox 14"/>
-          <p:cNvSpPr txBox="1"/>
-          <p:nvPr/>
-        </p:nvSpPr>
-        <p:spPr>
-          <a:xfrm>
-            <a:off x="8156448" y="2130552"/>
-            <a:ext cx="3200400" cy="457200"/>
-          </a:xfrm>
-          <a:prstGeom prst="rect">
-            <a:avLst/>
-          </a:prstGeom>
-          <a:noFill/>
-        </p:spPr>
-        <p:txBody>
-          <a:bodyPr wrap="square" anchor="t" lIns="0" rIns="0" tIns="0" bIns="0">
-            <a:spAutoFit/>
-          </a:bodyPr>
-          <a:lstStyle/>
-          <a:p>
-            <a:pPr algn="l">
-              <a:spcAft>
-                <a:spcPts val="400"/>
-              </a:spcAft>
-            </a:pPr>
-            <a:r>
-              <a:rPr sz="1300" b="1">
-                <a:solidFill>
-                  <a:srgbClr val="D31245"/>
-                </a:solidFill>
-                <a:latin typeface="Calibri"/>
-              </a:rPr>
-              <a:t>!  Needs real-world build</a:t>
-            </a:r>
-          </a:p>
-        </p:txBody>
-      </p:sp>
-      <p:sp>
-        <p:nvSpPr>
-          <p:cNvPr id="16" name="TextBox 15"/>
-          <p:cNvSpPr txBox="1"/>
-          <p:nvPr/>
-        </p:nvSpPr>
-        <p:spPr>
-          <a:xfrm>
-            <a:off x="8156448" y="2651760"/>
-            <a:ext cx="3200400" cy="2011680"/>
-          </a:xfrm>
-          <a:prstGeom prst="rect">
-            <a:avLst/>
-          </a:prstGeom>
-          <a:noFill/>
-        </p:spPr>
-        <p:txBody>
-          <a:bodyPr wrap="square" lIns="0" tIns="0">
-            <a:spAutoFit/>
-          </a:bodyPr>
-          <a:lstStyle/>
-          <a:p>
-            <a:pPr>
-              <a:lnSpc>
-                <a:spcPct val="105000"/>
-              </a:lnSpc>
-              <a:spcAft>
-                <a:spcPts val="800"/>
-              </a:spcAft>
-            </a:pPr>
-            <a:r>
-              <a:rPr sz="700">
-                <a:solidFill>
-                  <a:srgbClr val="D31245"/>
-                </a:solidFill>
-                <a:latin typeface="Calibri"/>
-              </a:rPr>
-              <a:t>•  </a:t>
-            </a:r>
-            <a:r>
-              <a:rPr sz="1100">
-                <a:solidFill>
-                  <a:srgbClr val="475569"/>
-                </a:solidFill>
-                <a:latin typeface="Calibri"/>
-              </a:rPr>
-              <a:t>Recyclability/material classifier on real items</a:t>
-            </a:r>
-          </a:p>
-          <a:p>
-            <a:pPr>
-              <a:lnSpc>
-                <a:spcPct val="105000"/>
-              </a:lnSpc>
-              <a:spcAft>
-                <a:spcPts val="800"/>
-              </a:spcAft>
-            </a:pPr>
-            <a:r>
-              <a:rPr sz="700">
-                <a:solidFill>
-                  <a:srgbClr val="D31245"/>
-                </a:solidFill>
-                <a:latin typeface="Calibri"/>
-              </a:rPr>
-              <a:t>•  </a:t>
-            </a:r>
-            <a:r>
-              <a:rPr sz="1100">
-                <a:solidFill>
-                  <a:srgbClr val="475569"/>
-                </a:solidFill>
-                <a:latin typeface="Calibri"/>
-              </a:rPr>
-              <a:t>Physical smart-bin hardware + load cells</a:t>
-            </a:r>
-          </a:p>
-          <a:p>
-            <a:pPr>
-              <a:lnSpc>
-                <a:spcPct val="105000"/>
-              </a:lnSpc>
-              <a:spcAft>
-                <a:spcPts val="800"/>
-              </a:spcAft>
-            </a:pPr>
-            <a:r>
-              <a:rPr sz="700">
-                <a:solidFill>
-                  <a:srgbClr val="D31245"/>
-                </a:solidFill>
-                <a:latin typeface="Calibri"/>
-              </a:rPr>
-              <a:t>•  </a:t>
-            </a:r>
-            <a:r>
-              <a:rPr sz="1100">
-                <a:solidFill>
-                  <a:srgbClr val="475569"/>
-                </a:solidFill>
-                <a:latin typeface="Calibri"/>
-              </a:rPr>
-              <a:t>POS/voucher + identity + telemetry integration</a:t>
-            </a:r>
-          </a:p>
-        </p:txBody>
-      </p:sp>
-      <p:sp>
-        <p:nvSpPr>
-          <p:cNvPr id="17" name="Rounded Rectangle 16"/>
-          <p:cNvSpPr/>
-          <p:nvPr/>
-        </p:nvSpPr>
-        <p:spPr>
-          <a:xfrm>
-            <a:off x="548640" y="5029200"/>
-            <a:ext cx="11064240" cy="914400"/>
-          </a:xfrm>
-          <a:prstGeom prst="roundRect">
-            <a:avLst>
-              <a:gd name="adj" fmla="val 6000"/>
-            </a:avLst>
-          </a:prstGeom>
-          <a:solidFill>
-            <a:srgbClr val="F8FAFC"/>
-          </a:solidFill>
-          <a:ln w="12700">
-            <a:solidFill>
-              <a:srgbClr val="E2E8F0"/>
-            </a:solidFill>
-          </a:ln>
-          <a:effectLst/>
-        </p:spPr>
-        <p:style>
-          <a:lnRef idx="1">
-            <a:schemeClr val="accent1"/>
-          </a:lnRef>
-          <a:fillRef idx="3">
-            <a:schemeClr val="accent1"/>
-          </a:fillRef>
-          <a:effectRef idx="2">
-            <a:schemeClr val="accent1"/>
-          </a:effectRef>
-          <a:fontRef idx="minor">
-            <a:schemeClr val="lt1"/>
-          </a:fontRef>
-        </p:style>
-        <p:txBody>
-          <a:bodyPr rtlCol="0" anchor="ctr"/>
-          <a:lstStyle/>
-          <a:p>
-            <a:pPr algn="ctr"/>
-          </a:p>
-        </p:txBody>
-      </p:sp>
-      <p:sp>
-        <p:nvSpPr>
-          <p:cNvPr id="18" name="TextBox 17"/>
-          <p:cNvSpPr txBox="1"/>
-          <p:nvPr/>
-        </p:nvSpPr>
-        <p:spPr>
-          <a:xfrm>
-            <a:off x="777240" y="5138928"/>
-            <a:ext cx="10607040" cy="731520"/>
-          </a:xfrm>
-          <a:prstGeom prst="rect">
-            <a:avLst/>
-          </a:prstGeom>
-          <a:noFill/>
-        </p:spPr>
-        <p:txBody>
-          <a:bodyPr wrap="square" anchor="t" lIns="0" rIns="0" tIns="0" bIns="0">
-            <a:spAutoFit/>
-          </a:bodyPr>
-          <a:lstStyle/>
-          <a:p>
-            <a:pPr algn="l">
-              <a:lnSpc>
-                <a:spcPct val="115000"/>
-              </a:lnSpc>
-              <a:spcBef>
-                <a:spcPts val="0"/>
-              </a:spcBef>
-              <a:spcAft>
-                <a:spcPts val="400"/>
-              </a:spcAft>
-            </a:pPr>
-            <a:r>
-              <a:rPr sz="1200" b="1">
-                <a:solidFill>
-                  <a:srgbClr val="0F172A"/>
-                </a:solidFill>
-                <a:latin typeface="Calibri"/>
-              </a:rPr>
-              <a:t>On AI accuracy &amp; anti-cheat:  </a:t>
-            </a:r>
-            <a:r>
-              <a:rPr sz="1150" b="0">
-                <a:solidFill>
-                  <a:srgbClr val="475569"/>
-                </a:solidFill>
-                <a:latin typeface="Calibri"/>
-              </a:rPr>
-              <a:t>the demo detects common objects (bottle, can, cup, phone); it does not yet confirm material purity. Production needs a recyclability classifier validated on real items, plus the two-camera entry/inside check to stop re-scanning without depositing.</a:t>
-            </a:r>
-          </a:p>
-        </p:txBody>
-      </p:sp>
+            <a:ln w="12700">
+              <a:solidFill>
+                <a:srgbClr val="E2E8F0"/>
+              </a:solidFill>
+            </a:ln>
+            <a:effectLst/>
+          </p:spPr>
+          <p:style>
+            <a:lnRef idx="1">
+              <a:schemeClr val="accent1"/>
+            </a:lnRef>
+            <a:fillRef idx="3">
+              <a:schemeClr val="accent1"/>
+            </a:fillRef>
+            <a:effectRef idx="2">
+              <a:schemeClr val="accent1"/>
+            </a:effectRef>
+            <a:fontRef idx="minor">
+              <a:schemeClr val="lt1"/>
+            </a:fontRef>
+          </p:style>
+          <p:txBody>
+            <a:bodyPr rtlCol="0" anchor="ctr"/>
+            <a:lstStyle/>
+            <a:p>
+              <a:pPr algn="ctr"/>
+              <a:endParaRPr/>
+            </a:p>
+          </p:txBody>
+        </p:sp>
+        <p:sp>
+          <p:nvSpPr>
+            <p:cNvPr id="18" name="TextBox 17"/>
+            <p:cNvSpPr txBox="1"/>
+            <p:nvPr/>
+          </p:nvSpPr>
+          <p:spPr>
+            <a:xfrm>
+              <a:off x="777240" y="5138928"/>
+              <a:ext cx="10607040" cy="731520"/>
+            </a:xfrm>
+            <a:prstGeom prst="rect">
+              <a:avLst/>
+            </a:prstGeom>
+            <a:noFill/>
+          </p:spPr>
+          <p:txBody>
+            <a:bodyPr wrap="square" lIns="0" tIns="0" rIns="0" bIns="0" anchor="t">
+              <a:spAutoFit/>
+            </a:bodyPr>
+            <a:lstStyle/>
+            <a:p>
+              <a:pPr algn="l">
+                <a:lnSpc>
+                  <a:spcPct val="115000"/>
+                </a:lnSpc>
+                <a:spcBef>
+                  <a:spcPts val="0"/>
+                </a:spcBef>
+                <a:spcAft>
+                  <a:spcPts val="400"/>
+                </a:spcAft>
+              </a:pPr>
+              <a:r>
+                <a:rPr sz="1200" b="1" dirty="0">
+                  <a:solidFill>
+                    <a:srgbClr val="0F172A"/>
+                  </a:solidFill>
+                  <a:latin typeface="Calibri"/>
+                </a:rPr>
+                <a:t>On AI accuracy &amp; anti-cheat:  </a:t>
+              </a:r>
+              <a:r>
+                <a:rPr sz="1150" b="0" dirty="0">
+                  <a:solidFill>
+                    <a:srgbClr val="475569"/>
+                  </a:solidFill>
+                  <a:latin typeface="Calibri"/>
+                </a:rPr>
+                <a:t>the demo detects common objects (bottle, can, cup, phone); it does not yet confirm material purity. Production needs a recyclability classifier validated on real items, plus the two-camera entry/inside check to stop re-scanning without depositing.</a:t>
+              </a:r>
+            </a:p>
+          </p:txBody>
+        </p:sp>
+      </p:grpSp>
       <p:sp>
         <p:nvSpPr>
           <p:cNvPr id="19" name="TextBox 18"/>
@@ -5681,7 +6091,7 @@
           <a:noFill/>
         </p:spPr>
         <p:txBody>
-          <a:bodyPr wrap="square" anchor="t" lIns="0" rIns="0" tIns="0" bIns="0">
+          <a:bodyPr wrap="square" lIns="0" tIns="0" rIns="0" bIns="0" anchor="t">
             <a:spAutoFit/>
           </a:bodyPr>
           <a:lstStyle/>
@@ -5720,7 +6130,7 @@
           <a:noFill/>
         </p:spPr>
         <p:txBody>
-          <a:bodyPr wrap="square" anchor="t" lIns="0" rIns="0" tIns="0" bIns="0">
+          <a:bodyPr wrap="square" lIns="0" tIns="0" rIns="0" bIns="0" anchor="t">
             <a:spAutoFit/>
           </a:bodyPr>
           <a:lstStyle/>
@@ -5742,6 +6152,692 @@
           </a:p>
         </p:txBody>
       </p:sp>
+      <p:grpSp>
+        <p:nvGrpSpPr>
+          <p:cNvPr id="39" name="Group 38"/>
+          <p:cNvGrpSpPr/>
+          <p:nvPr/>
+        </p:nvGrpSpPr>
+        <p:grpSpPr>
+          <a:xfrm>
+            <a:off x="6356275" y="2060896"/>
+            <a:ext cx="2693324" cy="2834640"/>
+            <a:chOff x="3168706" y="1828800"/>
+            <a:chExt cx="2693324" cy="2834640"/>
+          </a:xfrm>
+        </p:grpSpPr>
+        <p:grpSp>
+          <p:nvGrpSpPr>
+            <p:cNvPr id="32" name="Group 31"/>
+            <p:cNvGrpSpPr/>
+            <p:nvPr/>
+          </p:nvGrpSpPr>
+          <p:grpSpPr>
+            <a:xfrm>
+              <a:off x="3168706" y="1828800"/>
+              <a:ext cx="2693324" cy="2834640"/>
+              <a:chOff x="3204556" y="1912022"/>
+              <a:chExt cx="2693324" cy="2834640"/>
+            </a:xfrm>
+          </p:grpSpPr>
+          <p:sp>
+            <p:nvSpPr>
+              <p:cNvPr id="33" name="Rounded Rectangle 32"/>
+              <p:cNvSpPr/>
+              <p:nvPr/>
+            </p:nvSpPr>
+            <p:spPr>
+              <a:xfrm>
+                <a:off x="3204556" y="1912022"/>
+                <a:ext cx="2693324" cy="2834640"/>
+              </a:xfrm>
+              <a:prstGeom prst="roundRect">
+                <a:avLst>
+                  <a:gd name="adj" fmla="val 6000"/>
+                </a:avLst>
+              </a:prstGeom>
+              <a:solidFill>
+                <a:srgbClr val="CCECFF"/>
+              </a:solidFill>
+              <a:ln w="12700">
+                <a:solidFill>
+                  <a:schemeClr val="tx2">
+                    <a:lumMod val="75000"/>
+                  </a:schemeClr>
+                </a:solidFill>
+              </a:ln>
+              <a:effectLst/>
+            </p:spPr>
+            <p:style>
+              <a:lnRef idx="1">
+                <a:schemeClr val="accent1"/>
+              </a:lnRef>
+              <a:fillRef idx="3">
+                <a:schemeClr val="accent1"/>
+              </a:fillRef>
+              <a:effectRef idx="2">
+                <a:schemeClr val="accent1"/>
+              </a:effectRef>
+              <a:fontRef idx="minor">
+                <a:schemeClr val="lt1"/>
+              </a:fontRef>
+            </p:style>
+            <p:txBody>
+              <a:bodyPr rtlCol="0" anchor="ctr"/>
+              <a:lstStyle/>
+              <a:p>
+                <a:pPr algn="ctr"/>
+                <a:endParaRPr/>
+              </a:p>
+            </p:txBody>
+          </p:sp>
+          <p:sp>
+            <p:nvSpPr>
+              <p:cNvPr id="34" name="TextBox 33"/>
+              <p:cNvSpPr txBox="1"/>
+              <p:nvPr/>
+            </p:nvSpPr>
+            <p:spPr>
+              <a:xfrm>
+                <a:off x="3479292" y="2128167"/>
+                <a:ext cx="2222838" cy="200055"/>
+              </a:xfrm>
+              <a:prstGeom prst="rect">
+                <a:avLst/>
+              </a:prstGeom>
+              <a:noFill/>
+            </p:spPr>
+            <p:txBody>
+              <a:bodyPr wrap="square" lIns="0" tIns="0" rIns="0" bIns="0" anchor="t">
+                <a:spAutoFit/>
+              </a:bodyPr>
+              <a:lstStyle/>
+              <a:p>
+                <a:pPr algn="l">
+                  <a:spcAft>
+                    <a:spcPts val="400"/>
+                  </a:spcAft>
+                </a:pPr>
+                <a:r>
+                  <a:rPr sz="1300" b="1" dirty="0">
+                    <a:solidFill>
+                      <a:srgbClr val="002060"/>
+                    </a:solidFill>
+                    <a:latin typeface="Calibri"/>
+                  </a:rPr>
+                  <a:t>~  </a:t>
+                </a:r>
+                <a:r>
+                  <a:rPr lang="en-US" sz="1300" b="1" dirty="0" smtClean="0">
+                    <a:solidFill>
+                      <a:srgbClr val="002060"/>
+                    </a:solidFill>
+                    <a:latin typeface="Calibri"/>
+                  </a:rPr>
+                  <a:t>Mobile Application </a:t>
+                </a:r>
+                <a:endParaRPr sz="1300" b="1" dirty="0">
+                  <a:solidFill>
+                    <a:srgbClr val="002060"/>
+                  </a:solidFill>
+                  <a:latin typeface="Calibri"/>
+                </a:endParaRPr>
+              </a:p>
+            </p:txBody>
+          </p:sp>
+          <p:sp>
+            <p:nvSpPr>
+              <p:cNvPr id="35" name="TextBox 34"/>
+              <p:cNvSpPr txBox="1"/>
+              <p:nvPr/>
+            </p:nvSpPr>
+            <p:spPr>
+              <a:xfrm>
+                <a:off x="3378459" y="2532942"/>
+                <a:ext cx="2424504" cy="1140056"/>
+              </a:xfrm>
+              <a:prstGeom prst="rect">
+                <a:avLst/>
+              </a:prstGeom>
+              <a:noFill/>
+            </p:spPr>
+            <p:txBody>
+              <a:bodyPr wrap="square" lIns="0" tIns="0">
+                <a:spAutoFit/>
+              </a:bodyPr>
+              <a:lstStyle/>
+              <a:p>
+                <a:pPr>
+                  <a:lnSpc>
+                    <a:spcPct val="105000"/>
+                  </a:lnSpc>
+                  <a:spcAft>
+                    <a:spcPts val="800"/>
+                  </a:spcAft>
+                </a:pPr>
+                <a:r>
+                  <a:rPr sz="700" dirty="0">
+                    <a:solidFill>
+                      <a:srgbClr val="002060"/>
+                    </a:solidFill>
+                    <a:latin typeface="Calibri"/>
+                  </a:rPr>
+                  <a:t>•  </a:t>
+                </a:r>
+                <a:r>
+                  <a:rPr lang="en-US" sz="1100" dirty="0" smtClean="0">
+                    <a:solidFill>
+                      <a:srgbClr val="002060"/>
+                    </a:solidFill>
+                    <a:latin typeface="Calibri"/>
+                  </a:rPr>
+                  <a:t>Phone Apps for User</a:t>
+                </a:r>
+                <a:endParaRPr sz="1100" dirty="0">
+                  <a:solidFill>
+                    <a:srgbClr val="002060"/>
+                  </a:solidFill>
+                  <a:latin typeface="Calibri"/>
+                </a:endParaRPr>
+              </a:p>
+              <a:p>
+                <a:pPr>
+                  <a:lnSpc>
+                    <a:spcPct val="105000"/>
+                  </a:lnSpc>
+                  <a:spcAft>
+                    <a:spcPts val="800"/>
+                  </a:spcAft>
+                </a:pPr>
+                <a:r>
+                  <a:rPr sz="700" dirty="0">
+                    <a:solidFill>
+                      <a:srgbClr val="002060"/>
+                    </a:solidFill>
+                    <a:latin typeface="Calibri"/>
+                  </a:rPr>
+                  <a:t>•  </a:t>
+                </a:r>
+                <a:r>
+                  <a:rPr lang="en-US" sz="1100" dirty="0" smtClean="0">
+                    <a:solidFill>
+                      <a:srgbClr val="002060"/>
+                    </a:solidFill>
+                    <a:latin typeface="Calibri"/>
+                  </a:rPr>
+                  <a:t>User to connect with the Smart Recycle Hub</a:t>
+                </a:r>
+              </a:p>
+              <a:p>
+                <a:pPr>
+                  <a:lnSpc>
+                    <a:spcPct val="105000"/>
+                  </a:lnSpc>
+                  <a:spcAft>
+                    <a:spcPts val="800"/>
+                  </a:spcAft>
+                </a:pPr>
+                <a:r>
+                  <a:rPr lang="en-US" sz="700" dirty="0">
+                    <a:solidFill>
+                      <a:srgbClr val="002060"/>
+                    </a:solidFill>
+                  </a:rPr>
+                  <a:t>•  </a:t>
+                </a:r>
+                <a:r>
+                  <a:rPr lang="en-US" sz="1100" dirty="0" smtClean="0">
+                    <a:solidFill>
+                      <a:srgbClr val="002060"/>
+                    </a:solidFill>
+                  </a:rPr>
+                  <a:t>Activity monitoring </a:t>
+                </a:r>
+                <a:r>
+                  <a:rPr lang="en-US" sz="1100" dirty="0">
+                    <a:solidFill>
+                      <a:srgbClr val="002060"/>
+                    </a:solidFill>
+                  </a:rPr>
+                  <a:t>+ Green Points wallet, redemption &amp; fee offset</a:t>
+                </a:r>
+              </a:p>
+            </p:txBody>
+          </p:sp>
+        </p:grpSp>
+        <p:pic>
+          <p:nvPicPr>
+            <p:cNvPr id="21" name="Picture 20"/>
+            <p:cNvPicPr>
+              <a:picLocks noChangeAspect="1"/>
+            </p:cNvPicPr>
+            <p:nvPr/>
+          </p:nvPicPr>
+          <p:blipFill>
+            <a:blip r:embed="rId4">
+              <a:extLst>
+                <a:ext uri="{28A0092B-C50C-407E-A947-70E740481C1C}">
+                  <a14:useLocalDpi xmlns:a14="http://schemas.microsoft.com/office/drawing/2010/main" val="0"/>
+                </a:ext>
+              </a:extLst>
+            </a:blip>
+            <a:stretch>
+              <a:fillRect/>
+            </a:stretch>
+          </p:blipFill>
+          <p:spPr>
+            <a:xfrm>
+              <a:off x="5254156" y="3589776"/>
+              <a:ext cx="481261" cy="989087"/>
+            </a:xfrm>
+            <a:prstGeom prst="rect">
+              <a:avLst/>
+            </a:prstGeom>
+            <a:ln>
+              <a:noFill/>
+            </a:ln>
+            <a:effectLst>
+              <a:outerShdw blurRad="190500" algn="tl" rotWithShape="0">
+                <a:srgbClr val="000000">
+                  <a:alpha val="70000"/>
+                </a:srgbClr>
+              </a:outerShdw>
+            </a:effectLst>
+          </p:spPr>
+        </p:pic>
+      </p:grpSp>
+      <p:grpSp>
+        <p:nvGrpSpPr>
+          <p:cNvPr id="38" name="Group 37"/>
+          <p:cNvGrpSpPr/>
+          <p:nvPr/>
+        </p:nvGrpSpPr>
+        <p:grpSpPr>
+          <a:xfrm>
+            <a:off x="3283766" y="2057441"/>
+            <a:ext cx="2693324" cy="2834640"/>
+            <a:chOff x="6055420" y="1828800"/>
+            <a:chExt cx="2693324" cy="2834640"/>
+          </a:xfrm>
+        </p:grpSpPr>
+        <p:grpSp>
+          <p:nvGrpSpPr>
+            <p:cNvPr id="30" name="Group 29"/>
+            <p:cNvGrpSpPr/>
+            <p:nvPr/>
+          </p:nvGrpSpPr>
+          <p:grpSpPr>
+            <a:xfrm>
+              <a:off x="6055420" y="1828800"/>
+              <a:ext cx="2693324" cy="2834640"/>
+              <a:chOff x="3204556" y="1912022"/>
+              <a:chExt cx="2693324" cy="2834640"/>
+            </a:xfrm>
+          </p:grpSpPr>
+          <p:sp>
+            <p:nvSpPr>
+              <p:cNvPr id="11" name="Rounded Rectangle 10"/>
+              <p:cNvSpPr/>
+              <p:nvPr/>
+            </p:nvSpPr>
+            <p:spPr>
+              <a:xfrm>
+                <a:off x="3204556" y="1912022"/>
+                <a:ext cx="2693324" cy="2834640"/>
+              </a:xfrm>
+              <a:prstGeom prst="roundRect">
+                <a:avLst>
+                  <a:gd name="adj" fmla="val 6000"/>
+                </a:avLst>
+              </a:prstGeom>
+              <a:solidFill>
+                <a:srgbClr val="FEF3E2"/>
+              </a:solidFill>
+              <a:ln w="12700">
+                <a:solidFill>
+                  <a:srgbClr val="F59E0B"/>
+                </a:solidFill>
+              </a:ln>
+              <a:effectLst/>
+            </p:spPr>
+            <p:style>
+              <a:lnRef idx="1">
+                <a:schemeClr val="accent1"/>
+              </a:lnRef>
+              <a:fillRef idx="3">
+                <a:schemeClr val="accent1"/>
+              </a:fillRef>
+              <a:effectRef idx="2">
+                <a:schemeClr val="accent1"/>
+              </a:effectRef>
+              <a:fontRef idx="minor">
+                <a:schemeClr val="lt1"/>
+              </a:fontRef>
+            </p:style>
+            <p:txBody>
+              <a:bodyPr rtlCol="0" anchor="ctr"/>
+              <a:lstStyle/>
+              <a:p>
+                <a:pPr algn="ctr"/>
+                <a:endParaRPr/>
+              </a:p>
+            </p:txBody>
+          </p:sp>
+          <p:sp>
+            <p:nvSpPr>
+              <p:cNvPr id="12" name="TextBox 11"/>
+              <p:cNvSpPr txBox="1"/>
+              <p:nvPr/>
+            </p:nvSpPr>
+            <p:spPr>
+              <a:xfrm>
+                <a:off x="3479292" y="2128167"/>
+                <a:ext cx="2222838" cy="200055"/>
+              </a:xfrm>
+              <a:prstGeom prst="rect">
+                <a:avLst/>
+              </a:prstGeom>
+              <a:noFill/>
+            </p:spPr>
+            <p:txBody>
+              <a:bodyPr wrap="square" lIns="0" tIns="0" rIns="0" bIns="0" anchor="t">
+                <a:spAutoFit/>
+              </a:bodyPr>
+              <a:lstStyle/>
+              <a:p>
+                <a:pPr algn="l">
+                  <a:spcAft>
+                    <a:spcPts val="400"/>
+                  </a:spcAft>
+                </a:pPr>
+                <a:r>
+                  <a:rPr sz="1300" b="1" dirty="0">
+                    <a:solidFill>
+                      <a:srgbClr val="F97316"/>
+                    </a:solidFill>
+                    <a:latin typeface="Calibri"/>
+                  </a:rPr>
+                  <a:t>~  Simulated in the prototype</a:t>
+                </a:r>
+              </a:p>
+            </p:txBody>
+          </p:sp>
+          <p:sp>
+            <p:nvSpPr>
+              <p:cNvPr id="13" name="TextBox 12"/>
+              <p:cNvSpPr txBox="1"/>
+              <p:nvPr/>
+            </p:nvSpPr>
+            <p:spPr>
+              <a:xfrm>
+                <a:off x="3438144" y="2544367"/>
+                <a:ext cx="2305134" cy="1317797"/>
+              </a:xfrm>
+              <a:prstGeom prst="rect">
+                <a:avLst/>
+              </a:prstGeom>
+              <a:noFill/>
+            </p:spPr>
+            <p:txBody>
+              <a:bodyPr wrap="square" lIns="0" tIns="0">
+                <a:spAutoFit/>
+              </a:bodyPr>
+              <a:lstStyle/>
+              <a:p>
+                <a:pPr>
+                  <a:lnSpc>
+                    <a:spcPct val="105000"/>
+                  </a:lnSpc>
+                  <a:spcAft>
+                    <a:spcPts val="800"/>
+                  </a:spcAft>
+                </a:pPr>
+                <a:r>
+                  <a:rPr sz="700" dirty="0">
+                    <a:solidFill>
+                      <a:srgbClr val="F97316"/>
+                    </a:solidFill>
+                    <a:latin typeface="Calibri"/>
+                  </a:rPr>
+                  <a:t>•  </a:t>
+                </a:r>
+                <a:r>
+                  <a:rPr sz="1100" dirty="0">
+                    <a:solidFill>
+                      <a:srgbClr val="475569"/>
+                    </a:solidFill>
+                    <a:latin typeface="Calibri"/>
+                  </a:rPr>
+                  <a:t>Bin fill levels &amp; sensor weights (demo values)</a:t>
+                </a:r>
+              </a:p>
+              <a:p>
+                <a:pPr>
+                  <a:lnSpc>
+                    <a:spcPct val="105000"/>
+                  </a:lnSpc>
+                  <a:spcAft>
+                    <a:spcPts val="800"/>
+                  </a:spcAft>
+                </a:pPr>
+                <a:r>
+                  <a:rPr sz="700" dirty="0">
+                    <a:solidFill>
+                      <a:srgbClr val="F97316"/>
+                    </a:solidFill>
+                    <a:latin typeface="Calibri"/>
+                  </a:rPr>
+                  <a:t>•  </a:t>
+                </a:r>
+                <a:r>
+                  <a:rPr sz="1100" dirty="0">
+                    <a:solidFill>
+                      <a:srgbClr val="475569"/>
+                    </a:solidFill>
+                    <a:latin typeface="Calibri"/>
+                  </a:rPr>
+                  <a:t>Two-camera cheat check (entry vs inside)</a:t>
+                </a:r>
+              </a:p>
+              <a:p>
+                <a:pPr>
+                  <a:lnSpc>
+                    <a:spcPct val="105000"/>
+                  </a:lnSpc>
+                  <a:spcAft>
+                    <a:spcPts val="800"/>
+                  </a:spcAft>
+                </a:pPr>
+                <a:r>
+                  <a:rPr sz="700" dirty="0">
+                    <a:solidFill>
+                      <a:srgbClr val="F97316"/>
+                    </a:solidFill>
+                    <a:latin typeface="Calibri"/>
+                  </a:rPr>
+                  <a:t>•  </a:t>
+                </a:r>
+                <a:r>
+                  <a:rPr sz="1100" dirty="0">
+                    <a:solidFill>
+                      <a:srgbClr val="475569"/>
+                    </a:solidFill>
+                    <a:latin typeface="Calibri"/>
+                  </a:rPr>
+                  <a:t>Township ROI from an indicative, tunable model</a:t>
+                </a:r>
+              </a:p>
+            </p:txBody>
+          </p:sp>
+        </p:grpSp>
+        <p:pic>
+          <p:nvPicPr>
+            <p:cNvPr id="37" name="Picture 36"/>
+            <p:cNvPicPr>
+              <a:picLocks noChangeAspect="1"/>
+            </p:cNvPicPr>
+            <p:nvPr/>
+          </p:nvPicPr>
+          <p:blipFill rotWithShape="1">
+            <a:blip r:embed="rId5">
+              <a:extLst>
+                <a:ext uri="{28A0092B-C50C-407E-A947-70E740481C1C}">
+                  <a14:useLocalDpi xmlns:a14="http://schemas.microsoft.com/office/drawing/2010/main" val="0"/>
+                </a:ext>
+              </a:extLst>
+            </a:blip>
+            <a:srcRect l="45436" t="22589" r="-967" b="4116"/>
+            <a:stretch/>
+          </p:blipFill>
+          <p:spPr>
+            <a:xfrm>
+              <a:off x="7466239" y="3539489"/>
+              <a:ext cx="1205204" cy="1089660"/>
+            </a:xfrm>
+            <a:prstGeom prst="rect">
+              <a:avLst/>
+            </a:prstGeom>
+            <a:ln>
+              <a:noFill/>
+            </a:ln>
+            <a:effectLst>
+              <a:outerShdw blurRad="190500" algn="tl" rotWithShape="0">
+                <a:srgbClr val="000000">
+                  <a:alpha val="70000"/>
+                </a:srgbClr>
+              </a:outerShdw>
+            </a:effectLst>
+          </p:spPr>
+        </p:pic>
+      </p:grpSp>
+      <p:sp>
+        <p:nvSpPr>
+          <p:cNvPr id="40" name="Rectangle 39"/>
+          <p:cNvSpPr/>
+          <p:nvPr/>
+        </p:nvSpPr>
+        <p:spPr>
+          <a:xfrm>
+            <a:off x="2124689" y="1590475"/>
+            <a:ext cx="2418161" cy="461665"/>
+          </a:xfrm>
+          <a:prstGeom prst="rect">
+            <a:avLst/>
+          </a:prstGeom>
+          <a:noFill/>
+        </p:spPr>
+        <p:txBody>
+          <a:bodyPr wrap="none" lIns="91440" tIns="45720" rIns="91440" bIns="45720">
+            <a:spAutoFit/>
+          </a:bodyPr>
+          <a:lstStyle/>
+          <a:p>
+            <a:pPr algn="ctr"/>
+            <a:r>
+              <a:rPr lang="en-US" sz="2400" b="1" dirty="0" smtClean="0">
+                <a:ln w="22225">
+                  <a:noFill/>
+                  <a:prstDash val="solid"/>
+                </a:ln>
+                <a:solidFill>
+                  <a:srgbClr val="00B050"/>
+                </a:solidFill>
+              </a:rPr>
+              <a:t>WORKING TODAY</a:t>
+            </a:r>
+            <a:endParaRPr lang="en-US" sz="2400" b="1" dirty="0">
+              <a:ln w="22225">
+                <a:noFill/>
+                <a:prstDash val="solid"/>
+              </a:ln>
+              <a:solidFill>
+                <a:srgbClr val="00B050"/>
+              </a:solidFill>
+            </a:endParaRPr>
+          </a:p>
+        </p:txBody>
+      </p:sp>
+      <p:sp>
+        <p:nvSpPr>
+          <p:cNvPr id="41" name="Rectangle 40"/>
+          <p:cNvSpPr/>
+          <p:nvPr/>
+        </p:nvSpPr>
+        <p:spPr>
+          <a:xfrm>
+            <a:off x="7236871" y="1599231"/>
+            <a:ext cx="3916650" cy="461665"/>
+          </a:xfrm>
+          <a:prstGeom prst="rect">
+            <a:avLst/>
+          </a:prstGeom>
+          <a:noFill/>
+        </p:spPr>
+        <p:txBody>
+          <a:bodyPr wrap="none" lIns="91440" tIns="45720" rIns="91440" bIns="45720">
+            <a:spAutoFit/>
+          </a:bodyPr>
+          <a:lstStyle/>
+          <a:p>
+            <a:pPr algn="ctr"/>
+            <a:r>
+              <a:rPr lang="en-US" sz="2400" b="1" dirty="0" smtClean="0">
+                <a:ln w="22225">
+                  <a:noFill/>
+                  <a:prstDash val="solid"/>
+                </a:ln>
+                <a:solidFill>
+                  <a:srgbClr val="002060"/>
+                </a:solidFill>
+              </a:rPr>
+              <a:t>WHAT STILL NEEDS BUILDING</a:t>
+            </a:r>
+            <a:endParaRPr lang="en-US" sz="2400" b="1" dirty="0">
+              <a:ln w="22225">
+                <a:noFill/>
+                <a:prstDash val="solid"/>
+              </a:ln>
+              <a:solidFill>
+                <a:srgbClr val="002060"/>
+              </a:solidFill>
+            </a:endParaRPr>
+          </a:p>
+        </p:txBody>
+      </p:sp>
+      <p:pic>
+        <p:nvPicPr>
+          <p:cNvPr id="44" name="Picture 43"/>
+          <p:cNvPicPr>
+            <a:picLocks noChangeAspect="1"/>
+          </p:cNvPicPr>
+          <p:nvPr/>
+        </p:nvPicPr>
+        <p:blipFill>
+          <a:blip r:embed="rId6"/>
+          <a:stretch>
+            <a:fillRect/>
+          </a:stretch>
+        </p:blipFill>
+        <p:spPr>
+          <a:xfrm>
+            <a:off x="1596359" y="3961203"/>
+            <a:ext cx="1370334" cy="764111"/>
+          </a:xfrm>
+          <a:prstGeom prst="rect">
+            <a:avLst/>
+          </a:prstGeom>
+          <a:ln>
+            <a:noFill/>
+          </a:ln>
+          <a:effectLst>
+            <a:outerShdw blurRad="190500" algn="tl" rotWithShape="0">
+              <a:srgbClr val="000000">
+                <a:alpha val="70000"/>
+              </a:srgbClr>
+            </a:outerShdw>
+          </a:effectLst>
+        </p:spPr>
+      </p:pic>
     </p:spTree>
   </p:cSld>
   <p:clrMapOvr>
@@ -5751,7 +6847,7 @@
 </file>
 
 <file path=ppt/slides/slide4.xml><?xml version="1.0" encoding="utf-8"?>
-<p:sld xmlns:a="http://schemas.openxmlformats.org/drawingml/2006/main" xmlns:p="http://schemas.openxmlformats.org/presentationml/2006/main" xmlns:r="http://schemas.openxmlformats.org/officeDocument/2006/relationships">
+<p:sld xmlns:a="http://schemas.openxmlformats.org/drawingml/2006/main" xmlns:r="http://schemas.openxmlformats.org/officeDocument/2006/relationships" xmlns:p="http://schemas.openxmlformats.org/presentationml/2006/main">
   <p:cSld>
     <p:spTree>
       <p:nvGrpSpPr>
@@ -5759,7 +6855,14 @@
         <p:cNvGrpSpPr/>
         <p:nvPr/>
       </p:nvGrpSpPr>
-      <p:grpSpPr/>
+      <p:grpSpPr>
+        <a:xfrm>
+          <a:off x="0" y="0"/>
+          <a:ext cx="0" cy="0"/>
+          <a:chOff x="0" y="0"/>
+          <a:chExt cx="0" cy="0"/>
+        </a:xfrm>
+      </p:grpSpPr>
       <p:sp>
         <p:nvSpPr>
           <p:cNvPr id="2" name="Rectangle 1"/>
@@ -5801,6 +6904,7 @@
           <a:lstStyle/>
           <a:p>
             <a:pPr algn="ctr"/>
+            <a:endParaRPr/>
           </a:p>
         </p:txBody>
       </p:sp>
@@ -5874,7 +6978,7 @@
           <a:noFill/>
         </p:spPr>
         <p:txBody>
-          <a:bodyPr wrap="square" anchor="ctr" lIns="0" rIns="0" tIns="0" bIns="0">
+          <a:bodyPr wrap="square" lIns="0" tIns="0" rIns="0" bIns="0" anchor="ctr">
             <a:spAutoFit/>
           </a:bodyPr>
           <a:lstStyle/>
@@ -5961,6 +7065,7 @@
           <a:lstStyle/>
           <a:p>
             <a:pPr algn="ctr"/>
+            <a:endParaRPr/>
           </a:p>
         </p:txBody>
       </p:sp>
@@ -5986,6 +7091,16 @@
           <a:prstGeom prst="rect">
             <a:avLst/>
           </a:prstGeom>
+          <a:ln>
+            <a:noFill/>
+          </a:ln>
+          <a:effectLst>
+            <a:outerShdw blurRad="190500" algn="tl" rotWithShape="0">
+              <a:srgbClr val="000000">
+                <a:alpha val="70000"/>
+              </a:srgbClr>
+            </a:outerShdw>
+          </a:effectLst>
         </p:spPr>
       </p:pic>
       <p:sp>
@@ -6029,6 +7144,7 @@
           <a:lstStyle/>
           <a:p>
             <a:pPr algn="ctr"/>
+            <a:endParaRPr/>
           </a:p>
         </p:txBody>
       </p:sp>
@@ -6049,7 +7165,7 @@
           <a:noFill/>
         </p:spPr>
         <p:txBody>
-          <a:bodyPr wrap="square" anchor="t" lIns="0" rIns="0" tIns="0" bIns="0">
+          <a:bodyPr wrap="square" lIns="0" tIns="0" rIns="0" bIns="0" anchor="t">
             <a:spAutoFit/>
           </a:bodyPr>
           <a:lstStyle/>
@@ -6093,6 +7209,16 @@
           <a:prstGeom prst="rect">
             <a:avLst/>
           </a:prstGeom>
+          <a:ln>
+            <a:noFill/>
+          </a:ln>
+          <a:effectLst>
+            <a:outerShdw blurRad="190500" algn="tl" rotWithShape="0">
+              <a:srgbClr val="000000">
+                <a:alpha val="70000"/>
+              </a:srgbClr>
+            </a:outerShdw>
+          </a:effectLst>
         </p:spPr>
       </p:pic>
       <p:sp>
@@ -6136,6 +7262,7 @@
           <a:lstStyle/>
           <a:p>
             <a:pPr algn="ctr"/>
+            <a:endParaRPr/>
           </a:p>
         </p:txBody>
       </p:sp>
@@ -6156,7 +7283,7 @@
           <a:noFill/>
         </p:spPr>
         <p:txBody>
-          <a:bodyPr wrap="square" anchor="t" lIns="0" rIns="0" tIns="0" bIns="0">
+          <a:bodyPr wrap="square" lIns="0" tIns="0" rIns="0" bIns="0" anchor="t">
             <a:spAutoFit/>
           </a:bodyPr>
           <a:lstStyle/>
@@ -6195,7 +7322,7 @@
           <a:noFill/>
         </p:spPr>
         <p:txBody>
-          <a:bodyPr wrap="square" anchor="t" lIns="0" rIns="0" tIns="0" bIns="0">
+          <a:bodyPr wrap="square" lIns="0" tIns="0" rIns="0" bIns="0" anchor="t">
             <a:spAutoFit/>
           </a:bodyPr>
           <a:lstStyle/>
@@ -6249,7 +7376,7 @@
           <a:noFill/>
         </p:spPr>
         <p:txBody>
-          <a:bodyPr wrap="square" anchor="t" lIns="0" rIns="0" tIns="0" bIns="0">
+          <a:bodyPr wrap="square" lIns="0" tIns="0" rIns="0" bIns="0" anchor="t">
             <a:spAutoFit/>
           </a:bodyPr>
           <a:lstStyle/>
@@ -6288,7 +7415,7 @@
           <a:noFill/>
         </p:spPr>
         <p:txBody>
-          <a:bodyPr wrap="square" anchor="t" lIns="0" rIns="0" tIns="0" bIns="0">
+          <a:bodyPr wrap="square" lIns="0" tIns="0" rIns="0" bIns="0" anchor="t">
             <a:spAutoFit/>
           </a:bodyPr>
           <a:lstStyle/>
@@ -6319,7 +7446,7 @@
 </file>
 
 <file path=ppt/slides/slide5.xml><?xml version="1.0" encoding="utf-8"?>
-<p:sld xmlns:a="http://schemas.openxmlformats.org/drawingml/2006/main" xmlns:p="http://schemas.openxmlformats.org/presentationml/2006/main" xmlns:r="http://schemas.openxmlformats.org/officeDocument/2006/relationships">
+<p:sld xmlns:a="http://schemas.openxmlformats.org/drawingml/2006/main" xmlns:r="http://schemas.openxmlformats.org/officeDocument/2006/relationships" xmlns:p="http://schemas.openxmlformats.org/presentationml/2006/main">
   <p:cSld>
     <p:spTree>
       <p:nvGrpSpPr>
@@ -6327,7 +7454,14 @@
         <p:cNvGrpSpPr/>
         <p:nvPr/>
       </p:nvGrpSpPr>
-      <p:grpSpPr/>
+      <p:grpSpPr>
+        <a:xfrm>
+          <a:off x="0" y="0"/>
+          <a:ext cx="0" cy="0"/>
+          <a:chOff x="0" y="0"/>
+          <a:chExt cx="0" cy="0"/>
+        </a:xfrm>
+      </p:grpSpPr>
       <p:sp>
         <p:nvSpPr>
           <p:cNvPr id="2" name="Rectangle 1"/>
@@ -6369,6 +7503,7 @@
           <a:lstStyle/>
           <a:p>
             <a:pPr algn="ctr"/>
+            <a:endParaRPr/>
           </a:p>
         </p:txBody>
       </p:sp>
@@ -6442,7 +7577,7 @@
           <a:noFill/>
         </p:spPr>
         <p:txBody>
-          <a:bodyPr wrap="square" anchor="ctr" lIns="0" rIns="0" tIns="0" bIns="0">
+          <a:bodyPr wrap="square" lIns="0" tIns="0" rIns="0" bIns="0" anchor="ctr">
             <a:spAutoFit/>
           </a:bodyPr>
           <a:lstStyle/>
@@ -6529,6 +7664,7 @@
           <a:lstStyle/>
           <a:p>
             <a:pPr algn="ctr"/>
+            <a:endParaRPr/>
           </a:p>
         </p:txBody>
       </p:sp>
@@ -6573,6 +7709,7 @@
           <a:lstStyle/>
           <a:p>
             <a:pPr algn="ctr"/>
+            <a:endParaRPr/>
           </a:p>
         </p:txBody>
       </p:sp>
@@ -6593,7 +7730,7 @@
           <a:noFill/>
         </p:spPr>
         <p:txBody>
-          <a:bodyPr wrap="square" anchor="ctr" lIns="0" rIns="0" tIns="0" bIns="0">
+          <a:bodyPr wrap="square" lIns="0" tIns="0" rIns="0" bIns="0" anchor="ctr">
             <a:spAutoFit/>
           </a:bodyPr>
           <a:lstStyle/>
@@ -6658,6 +7795,7 @@
           <a:lstStyle/>
           <a:p>
             <a:pPr algn="ctr"/>
+            <a:endParaRPr/>
           </a:p>
         </p:txBody>
       </p:sp>
@@ -6678,7 +7816,7 @@
           <a:noFill/>
         </p:spPr>
         <p:txBody>
-          <a:bodyPr wrap="square" anchor="ctr" lIns="0" rIns="0" tIns="0" bIns="0">
+          <a:bodyPr wrap="square" lIns="0" tIns="0" rIns="0" bIns="0" anchor="ctr">
             <a:spAutoFit/>
           </a:bodyPr>
           <a:lstStyle/>
@@ -6741,6 +7879,7 @@
           <a:lstStyle/>
           <a:p>
             <a:pPr algn="ctr"/>
+            <a:endParaRPr/>
           </a:p>
         </p:txBody>
       </p:sp>
@@ -6761,7 +7900,7 @@
           <a:noFill/>
         </p:spPr>
         <p:txBody>
-          <a:bodyPr wrap="square" anchor="ctr" lIns="0" rIns="0" tIns="0" bIns="0">
+          <a:bodyPr wrap="square" lIns="0" tIns="0" rIns="0" bIns="0" anchor="ctr">
             <a:spAutoFit/>
           </a:bodyPr>
           <a:lstStyle/>
@@ -6826,6 +7965,7 @@
           <a:lstStyle/>
           <a:p>
             <a:pPr algn="ctr"/>
+            <a:endParaRPr/>
           </a:p>
         </p:txBody>
       </p:sp>
@@ -6846,7 +7986,7 @@
           <a:noFill/>
         </p:spPr>
         <p:txBody>
-          <a:bodyPr wrap="square" anchor="ctr" lIns="0" rIns="0" tIns="0" bIns="0">
+          <a:bodyPr wrap="square" lIns="0" tIns="0" rIns="0" bIns="0" anchor="ctr">
             <a:spAutoFit/>
           </a:bodyPr>
           <a:lstStyle/>
@@ -6909,6 +8049,7 @@
           <a:lstStyle/>
           <a:p>
             <a:pPr algn="ctr"/>
+            <a:endParaRPr/>
           </a:p>
         </p:txBody>
       </p:sp>
@@ -6929,7 +8070,7 @@
           <a:noFill/>
         </p:spPr>
         <p:txBody>
-          <a:bodyPr wrap="square" anchor="ctr" lIns="0" rIns="0" tIns="0" bIns="0">
+          <a:bodyPr wrap="square" lIns="0" tIns="0" rIns="0" bIns="0" anchor="ctr">
             <a:spAutoFit/>
           </a:bodyPr>
           <a:lstStyle/>
@@ -6994,6 +8135,7 @@
           <a:lstStyle/>
           <a:p>
             <a:pPr algn="ctr"/>
+            <a:endParaRPr/>
           </a:p>
         </p:txBody>
       </p:sp>
@@ -7014,7 +8156,7 @@
           <a:noFill/>
         </p:spPr>
         <p:txBody>
-          <a:bodyPr wrap="square" anchor="ctr" lIns="0" rIns="0" tIns="0" bIns="0">
+          <a:bodyPr wrap="square" lIns="0" tIns="0" rIns="0" bIns="0" anchor="ctr">
             <a:spAutoFit/>
           </a:bodyPr>
           <a:lstStyle/>
@@ -7077,6 +8219,7 @@
           <a:lstStyle/>
           <a:p>
             <a:pPr algn="ctr"/>
+            <a:endParaRPr/>
           </a:p>
         </p:txBody>
       </p:sp>
@@ -7097,7 +8240,7 @@
           <a:noFill/>
         </p:spPr>
         <p:txBody>
-          <a:bodyPr wrap="square" anchor="ctr" lIns="0" rIns="0" tIns="0" bIns="0">
+          <a:bodyPr wrap="square" lIns="0" tIns="0" rIns="0" bIns="0" anchor="ctr">
             <a:spAutoFit/>
           </a:bodyPr>
           <a:lstStyle/>
@@ -7162,6 +8305,7 @@
           <a:lstStyle/>
           <a:p>
             <a:pPr algn="ctr"/>
+            <a:endParaRPr/>
           </a:p>
         </p:txBody>
       </p:sp>
@@ -7182,7 +8326,7 @@
           <a:noFill/>
         </p:spPr>
         <p:txBody>
-          <a:bodyPr wrap="square" anchor="ctr" lIns="0" rIns="0" tIns="0" bIns="0">
+          <a:bodyPr wrap="square" lIns="0" tIns="0" rIns="0" bIns="0" anchor="ctr">
             <a:spAutoFit/>
           </a:bodyPr>
           <a:lstStyle/>
@@ -7245,6 +8389,7 @@
           <a:lstStyle/>
           <a:p>
             <a:pPr algn="ctr"/>
+            <a:endParaRPr/>
           </a:p>
         </p:txBody>
       </p:sp>
@@ -7265,7 +8410,7 @@
           <a:noFill/>
         </p:spPr>
         <p:txBody>
-          <a:bodyPr wrap="square" anchor="ctr" lIns="0" rIns="0" tIns="0" bIns="0">
+          <a:bodyPr wrap="square" lIns="0" tIns="0" rIns="0" bIns="0" anchor="ctr">
             <a:spAutoFit/>
           </a:bodyPr>
           <a:lstStyle/>
@@ -7330,6 +8475,7 @@
           <a:lstStyle/>
           <a:p>
             <a:pPr algn="ctr"/>
+            <a:endParaRPr/>
           </a:p>
         </p:txBody>
       </p:sp>
@@ -7350,7 +8496,7 @@
           <a:noFill/>
         </p:spPr>
         <p:txBody>
-          <a:bodyPr wrap="square" anchor="ctr" lIns="0" rIns="0" tIns="0" bIns="0">
+          <a:bodyPr wrap="square" lIns="0" tIns="0" rIns="0" bIns="0" anchor="ctr">
             <a:spAutoFit/>
           </a:bodyPr>
           <a:lstStyle/>
@@ -7413,6 +8559,7 @@
           <a:lstStyle/>
           <a:p>
             <a:pPr algn="ctr"/>
+            <a:endParaRPr/>
           </a:p>
         </p:txBody>
       </p:sp>
@@ -7433,7 +8580,7 @@
           <a:noFill/>
         </p:spPr>
         <p:txBody>
-          <a:bodyPr wrap="square" anchor="ctr" lIns="0" rIns="0" tIns="0" bIns="0">
+          <a:bodyPr wrap="square" lIns="0" tIns="0" rIns="0" bIns="0" anchor="ctr">
             <a:spAutoFit/>
           </a:bodyPr>
           <a:lstStyle/>
@@ -7498,6 +8645,7 @@
           <a:lstStyle/>
           <a:p>
             <a:pPr algn="ctr"/>
+            <a:endParaRPr/>
           </a:p>
         </p:txBody>
       </p:sp>
@@ -7518,7 +8666,7 @@
           <a:noFill/>
         </p:spPr>
         <p:txBody>
-          <a:bodyPr wrap="square" anchor="ctr" lIns="0" rIns="0" tIns="0" bIns="0">
+          <a:bodyPr wrap="square" lIns="0" tIns="0" rIns="0" bIns="0" anchor="ctr">
             <a:spAutoFit/>
           </a:bodyPr>
           <a:lstStyle/>
@@ -7557,7 +8705,7 @@
           <a:noFill/>
         </p:spPr>
         <p:txBody>
-          <a:bodyPr wrap="square" anchor="t" lIns="0" rIns="0" tIns="0" bIns="0">
+          <a:bodyPr wrap="square" lIns="0" tIns="0" rIns="0" bIns="0" anchor="t">
             <a:spAutoFit/>
           </a:bodyPr>
           <a:lstStyle/>
@@ -7596,7 +8744,7 @@
           <a:noFill/>
         </p:spPr>
         <p:txBody>
-          <a:bodyPr wrap="square" anchor="t" lIns="0" rIns="0" tIns="0" bIns="0">
+          <a:bodyPr wrap="square" lIns="0" tIns="0" rIns="0" bIns="0" anchor="t">
             <a:spAutoFit/>
           </a:bodyPr>
           <a:lstStyle/>
@@ -7944,4 +9092,265 @@
   </a:objectDefaults>
   <a:extraClrSchemeLst/>
 </a:theme>
+</file>
+
+<file path=ppt/theme/theme2.xml><?xml version="1.0" encoding="utf-8"?>
+<a:theme xmlns:a="http://schemas.openxmlformats.org/drawingml/2006/main" name="Office Theme">
+  <a:themeElements>
+    <a:clrScheme name="Office">
+      <a:dk1>
+        <a:sysClr val="windowText" lastClr="000000"/>
+      </a:dk1>
+      <a:lt1>
+        <a:sysClr val="window" lastClr="FFFFFF"/>
+      </a:lt1>
+      <a:dk2>
+        <a:srgbClr val="44546A"/>
+      </a:dk2>
+      <a:lt2>
+        <a:srgbClr val="E7E6E6"/>
+      </a:lt2>
+      <a:accent1>
+        <a:srgbClr val="5B9BD5"/>
+      </a:accent1>
+      <a:accent2>
+        <a:srgbClr val="ED7D31"/>
+      </a:accent2>
+      <a:accent3>
+        <a:srgbClr val="A5A5A5"/>
+      </a:accent3>
+      <a:accent4>
+        <a:srgbClr val="FFC000"/>
+      </a:accent4>
+      <a:accent5>
+        <a:srgbClr val="4472C4"/>
+      </a:accent5>
+      <a:accent6>
+        <a:srgbClr val="70AD47"/>
+      </a:accent6>
+      <a:hlink>
+        <a:srgbClr val="0563C1"/>
+      </a:hlink>
+      <a:folHlink>
+        <a:srgbClr val="954F72"/>
+      </a:folHlink>
+    </a:clrScheme>
+    <a:fontScheme name="Office">
+      <a:majorFont>
+        <a:latin typeface="Calibri Light" panose="020F0302020204030204"/>
+        <a:ea typeface=""/>
+        <a:cs typeface=""/>
+        <a:font script="Jpan" typeface="ＭＳ Ｐゴシック"/>
+        <a:font script="Hang" typeface="맑은 고딕"/>
+        <a:font script="Hans" typeface="宋体"/>
+        <a:font script="Hant" typeface="新細明體"/>
+        <a:font script="Arab" typeface="Times New Roman"/>
+        <a:font script="Hebr" typeface="Times New Roman"/>
+        <a:font script="Thai" typeface="Angsana New"/>
+        <a:font script="Ethi" typeface="Nyala"/>
+        <a:font script="Beng" typeface="Vrinda"/>
+        <a:font script="Gujr" typeface="Shruti"/>
+        <a:font script="Khmr" typeface="MoolBoran"/>
+        <a:font script="Knda" typeface="Tunga"/>
+        <a:font script="Guru" typeface="Raavi"/>
+        <a:font script="Cans" typeface="Euphemia"/>
+        <a:font script="Cher" typeface="Plantagenet Cherokee"/>
+        <a:font script="Yiii" typeface="Microsoft Yi Baiti"/>
+        <a:font script="Tibt" typeface="Microsoft Himalaya"/>
+        <a:font script="Thaa" typeface="MV Boli"/>
+        <a:font script="Deva" typeface="Mangal"/>
+        <a:font script="Telu" typeface="Gautami"/>
+        <a:font script="Taml" typeface="Latha"/>
+        <a:font script="Syrc" typeface="Estrangelo Edessa"/>
+        <a:font script="Orya" typeface="Kalinga"/>
+        <a:font script="Mlym" typeface="Kartika"/>
+        <a:font script="Laoo" typeface="DokChampa"/>
+        <a:font script="Sinh" typeface="Iskoola Pota"/>
+        <a:font script="Mong" typeface="Mongolian Baiti"/>
+        <a:font script="Viet" typeface="Times New Roman"/>
+        <a:font script="Uigh" typeface="Microsoft Uighur"/>
+        <a:font script="Geor" typeface="Sylfaen"/>
+      </a:majorFont>
+      <a:minorFont>
+        <a:latin typeface="Calibri" panose="020F0502020204030204"/>
+        <a:ea typeface=""/>
+        <a:cs typeface=""/>
+        <a:font script="Jpan" typeface="ＭＳ Ｐゴシック"/>
+        <a:font script="Hang" typeface="맑은 고딕"/>
+        <a:font script="Hans" typeface="宋体"/>
+        <a:font script="Hant" typeface="新細明體"/>
+        <a:font script="Arab" typeface="Arial"/>
+        <a:font script="Hebr" typeface="Arial"/>
+        <a:font script="Thai" typeface="Cordia New"/>
+        <a:font script="Ethi" typeface="Nyala"/>
+        <a:font script="Beng" typeface="Vrinda"/>
+        <a:font script="Gujr" typeface="Shruti"/>
+        <a:font script="Khmr" typeface="DaunPenh"/>
+        <a:font script="Knda" typeface="Tunga"/>
+        <a:font script="Guru" typeface="Raavi"/>
+        <a:font script="Cans" typeface="Euphemia"/>
+        <a:font script="Cher" typeface="Plantagenet Cherokee"/>
+        <a:font script="Yiii" typeface="Microsoft Yi Baiti"/>
+        <a:font script="Tibt" typeface="Microsoft Himalaya"/>
+        <a:font script="Thaa" typeface="MV Boli"/>
+        <a:font script="Deva" typeface="Mangal"/>
+        <a:font script="Telu" typeface="Gautami"/>
+        <a:font script="Taml" typeface="Latha"/>
+        <a:font script="Syrc" typeface="Estrangelo Edessa"/>
+        <a:font script="Orya" typeface="Kalinga"/>
+        <a:font script="Mlym" typeface="Kartika"/>
+        <a:font script="Laoo" typeface="DokChampa"/>
+        <a:font script="Sinh" typeface="Iskoola Pota"/>
+        <a:font script="Mong" typeface="Mongolian Baiti"/>
+        <a:font script="Viet" typeface="Arial"/>
+        <a:font script="Uigh" typeface="Microsoft Uighur"/>
+        <a:font script="Geor" typeface="Sylfaen"/>
+      </a:minorFont>
+    </a:fontScheme>
+    <a:fmtScheme name="Office">
+      <a:fillStyleLst>
+        <a:solidFill>
+          <a:schemeClr val="phClr"/>
+        </a:solidFill>
+        <a:gradFill rotWithShape="1">
+          <a:gsLst>
+            <a:gs pos="0">
+              <a:schemeClr val="phClr">
+                <a:lumMod val="110000"/>
+                <a:satMod val="105000"/>
+                <a:tint val="67000"/>
+              </a:schemeClr>
+            </a:gs>
+            <a:gs pos="50000">
+              <a:schemeClr val="phClr">
+                <a:lumMod val="105000"/>
+                <a:satMod val="103000"/>
+                <a:tint val="73000"/>
+              </a:schemeClr>
+            </a:gs>
+            <a:gs pos="100000">
+              <a:schemeClr val="phClr">
+                <a:lumMod val="105000"/>
+                <a:satMod val="109000"/>
+                <a:tint val="81000"/>
+              </a:schemeClr>
+            </a:gs>
+          </a:gsLst>
+          <a:lin ang="5400000" scaled="0"/>
+        </a:gradFill>
+        <a:gradFill rotWithShape="1">
+          <a:gsLst>
+            <a:gs pos="0">
+              <a:schemeClr val="phClr">
+                <a:satMod val="103000"/>
+                <a:lumMod val="102000"/>
+                <a:tint val="94000"/>
+              </a:schemeClr>
+            </a:gs>
+            <a:gs pos="50000">
+              <a:schemeClr val="phClr">
+                <a:satMod val="110000"/>
+                <a:lumMod val="100000"/>
+                <a:shade val="100000"/>
+              </a:schemeClr>
+            </a:gs>
+            <a:gs pos="100000">
+              <a:schemeClr val="phClr">
+                <a:lumMod val="99000"/>
+                <a:satMod val="120000"/>
+                <a:shade val="78000"/>
+              </a:schemeClr>
+            </a:gs>
+          </a:gsLst>
+          <a:lin ang="5400000" scaled="0"/>
+        </a:gradFill>
+      </a:fillStyleLst>
+      <a:lnStyleLst>
+        <a:ln w="6350" cap="flat" cmpd="sng" algn="ctr">
+          <a:solidFill>
+            <a:schemeClr val="phClr"/>
+          </a:solidFill>
+          <a:prstDash val="solid"/>
+          <a:miter lim="800000"/>
+        </a:ln>
+        <a:ln w="12700" cap="flat" cmpd="sng" algn="ctr">
+          <a:solidFill>
+            <a:schemeClr val="phClr"/>
+          </a:solidFill>
+          <a:prstDash val="solid"/>
+          <a:miter lim="800000"/>
+        </a:ln>
+        <a:ln w="19050" cap="flat" cmpd="sng" algn="ctr">
+          <a:solidFill>
+            <a:schemeClr val="phClr"/>
+          </a:solidFill>
+          <a:prstDash val="solid"/>
+          <a:miter lim="800000"/>
+        </a:ln>
+      </a:lnStyleLst>
+      <a:effectStyleLst>
+        <a:effectStyle>
+          <a:effectLst/>
+        </a:effectStyle>
+        <a:effectStyle>
+          <a:effectLst/>
+        </a:effectStyle>
+        <a:effectStyle>
+          <a:effectLst>
+            <a:outerShdw blurRad="57150" dist="19050" dir="5400000" algn="ctr" rotWithShape="0">
+              <a:srgbClr val="000000">
+                <a:alpha val="63000"/>
+              </a:srgbClr>
+            </a:outerShdw>
+          </a:effectLst>
+        </a:effectStyle>
+      </a:effectStyleLst>
+      <a:bgFillStyleLst>
+        <a:solidFill>
+          <a:schemeClr val="phClr"/>
+        </a:solidFill>
+        <a:solidFill>
+          <a:schemeClr val="phClr">
+            <a:tint val="95000"/>
+            <a:satMod val="170000"/>
+          </a:schemeClr>
+        </a:solidFill>
+        <a:gradFill rotWithShape="1">
+          <a:gsLst>
+            <a:gs pos="0">
+              <a:schemeClr val="phClr">
+                <a:tint val="93000"/>
+                <a:satMod val="150000"/>
+                <a:shade val="98000"/>
+                <a:lumMod val="102000"/>
+              </a:schemeClr>
+            </a:gs>
+            <a:gs pos="50000">
+              <a:schemeClr val="phClr">
+                <a:tint val="98000"/>
+                <a:satMod val="130000"/>
+                <a:shade val="90000"/>
+                <a:lumMod val="103000"/>
+              </a:schemeClr>
+            </a:gs>
+            <a:gs pos="100000">
+              <a:schemeClr val="phClr">
+                <a:shade val="63000"/>
+                <a:satMod val="120000"/>
+              </a:schemeClr>
+            </a:gs>
+          </a:gsLst>
+          <a:lin ang="5400000" scaled="0"/>
+        </a:gradFill>
+      </a:bgFillStyleLst>
+    </a:fmtScheme>
+  </a:themeElements>
+  <a:objectDefaults/>
+  <a:extraClrSchemeLst/>
+  <a:extLst>
+    <a:ext uri="{05A4C25C-085E-4340-85A3-A5531E510DB2}">
+      <thm15:themeFamily xmlns:thm15="http://schemas.microsoft.com/office/thememl/2012/main" name="Office Theme" id="{62F939B6-93AF-4DB8-9C6B-D6C7DFDC589F}" vid="{4A3C46E8-61CC-4603-A589-7422A47A8E4A}"/>
+    </a:ext>
+  </a:extLst>
+</a:theme>
 </file>